--- a/Demo/Project-Orchestrator-Demo.pptx
+++ b/Demo/Project-Orchestrator-Demo.pptx
@@ -5,18 +5,19 @@
     <p:sldMasterId id="2147483648" r:id="rId1"/>
   </p:sldMasterIdLst>
   <p:sldIdLst>
-    <p:sldId id="256" r:id="rId7"/>
-    <p:sldId id="257" r:id="rId8"/>
-    <p:sldId id="258" r:id="rId9"/>
-    <p:sldId id="259" r:id="rId10"/>
-    <p:sldId id="260" r:id="rId11"/>
-    <p:sldId id="261" r:id="rId12"/>
-    <p:sldId id="262" r:id="rId13"/>
-    <p:sldId id="263" r:id="rId14"/>
-    <p:sldId id="264" r:id="rId15"/>
-    <p:sldId id="265" r:id="rId16"/>
+    <p:sldId id="256" r:id="rId2"/>
+    <p:sldId id="257" r:id="rId3"/>
+    <p:sldId id="266" r:id="rId4"/>
+    <p:sldId id="258" r:id="rId5"/>
+    <p:sldId id="259" r:id="rId6"/>
+    <p:sldId id="260" r:id="rId7"/>
+    <p:sldId id="261" r:id="rId8"/>
+    <p:sldId id="262" r:id="rId9"/>
+    <p:sldId id="263" r:id="rId10"/>
+    <p:sldId id="264" r:id="rId11"/>
+    <p:sldId id="265" r:id="rId12"/>
   </p:sldIdLst>
-  <p:sldSz cx="12191695" cy="6858000" type="screen4x3"/>
+  <p:sldSz cx="12192000" cy="6858000"/>
   <p:notesSz cx="6858000" cy="9144000"/>
   <p:defaultTextStyle>
     <a:defPPr>
@@ -113,6 +114,22 @@
       </a:defRPr>
     </a:lvl9pPr>
   </p:defaultTextStyle>
+  <p:extLst>
+    <p:ext uri="{EFAFB233-063F-42B5-8137-9DF3F51BA10A}">
+      <p15:sldGuideLst xmlns:p15="http://schemas.microsoft.com/office/powerpoint/2012/main">
+        <p15:guide id="1" orient="horz" pos="2160">
+          <p15:clr>
+            <a:srgbClr val="A4A3A4"/>
+          </p15:clr>
+        </p15:guide>
+        <p15:guide id="2" pos="2880">
+          <p15:clr>
+            <a:srgbClr val="A4A3A4"/>
+          </p15:clr>
+        </p15:guide>
+      </p15:sldGuideLst>
+    </p:ext>
+  </p:extLst>
 </p:presentation>
 </file>
 
@@ -154,10 +171,9 @@
           <a:lstStyle/>
           <a:p>
             <a:r>
-              <a:rPr lang="en-US" smtClean="0"/>
+              <a:rPr lang="en-US"/>
               <a:t>Click to edit Master title style</a:t>
             </a:r>
-            <a:endParaRPr lang="en-US"/>
           </a:p>
         </p:txBody>
       </p:sp>
@@ -273,10 +289,9 @@
           </a:lstStyle>
           <a:p>
             <a:r>
-              <a:rPr lang="en-US" smtClean="0"/>
+              <a:rPr lang="en-US"/>
               <a:t>Click to edit Master subtitle style</a:t>
             </a:r>
-            <a:endParaRPr lang="en-US"/>
           </a:p>
         </p:txBody>
       </p:sp>
@@ -297,7 +312,7 @@
           <a:p>
             <a:fld id="{5BCAD085-E8A6-8845-BD4E-CB4CCA059FC4}" type="datetimeFigureOut">
               <a:rPr lang="en-US" smtClean="0"/>
-              <a:t>1/27/13</a:t>
+              <a:t>9/9/2026</a:t>
             </a:fld>
             <a:endParaRPr lang="en-US"/>
           </a:p>
@@ -391,10 +406,9 @@
           <a:lstStyle/>
           <a:p>
             <a:r>
-              <a:rPr lang="en-US" smtClean="0"/>
+              <a:rPr lang="en-US"/>
               <a:t>Click to edit Master title style</a:t>
             </a:r>
-            <a:endParaRPr lang="en-US"/>
           </a:p>
         </p:txBody>
       </p:sp>
@@ -415,38 +429,37 @@
           <a:p>
             <a:pPr lvl="0"/>
             <a:r>
-              <a:rPr lang="en-US" smtClean="0"/>
+              <a:rPr lang="en-US"/>
               <a:t>Click to edit Master text styles</a:t>
             </a:r>
           </a:p>
           <a:p>
             <a:pPr lvl="1"/>
             <a:r>
-              <a:rPr lang="en-US" smtClean="0"/>
+              <a:rPr lang="en-US"/>
               <a:t>Second level</a:t>
             </a:r>
           </a:p>
           <a:p>
             <a:pPr lvl="2"/>
             <a:r>
-              <a:rPr lang="en-US" smtClean="0"/>
+              <a:rPr lang="en-US"/>
               <a:t>Third level</a:t>
             </a:r>
           </a:p>
           <a:p>
             <a:pPr lvl="3"/>
             <a:r>
-              <a:rPr lang="en-US" smtClean="0"/>
+              <a:rPr lang="en-US"/>
               <a:t>Fourth level</a:t>
             </a:r>
           </a:p>
           <a:p>
             <a:pPr lvl="4"/>
             <a:r>
-              <a:rPr lang="en-US" smtClean="0"/>
+              <a:rPr lang="en-US"/>
               <a:t>Fifth level</a:t>
             </a:r>
-            <a:endParaRPr lang="en-US"/>
           </a:p>
         </p:txBody>
       </p:sp>
@@ -467,7 +480,7 @@
           <a:p>
             <a:fld id="{5BCAD085-E8A6-8845-BD4E-CB4CCA059FC4}" type="datetimeFigureOut">
               <a:rPr lang="en-US" smtClean="0"/>
-              <a:t>1/27/13</a:t>
+              <a:t>9/9/2026</a:t>
             </a:fld>
             <a:endParaRPr lang="en-US"/>
           </a:p>
@@ -566,10 +579,9 @@
           <a:lstStyle/>
           <a:p>
             <a:r>
-              <a:rPr lang="en-US" smtClean="0"/>
+              <a:rPr lang="en-US"/>
               <a:t>Click to edit Master title style</a:t>
             </a:r>
-            <a:endParaRPr lang="en-US"/>
           </a:p>
         </p:txBody>
       </p:sp>
@@ -595,38 +607,37 @@
           <a:p>
             <a:pPr lvl="0"/>
             <a:r>
-              <a:rPr lang="en-US" smtClean="0"/>
+              <a:rPr lang="en-US"/>
               <a:t>Click to edit Master text styles</a:t>
             </a:r>
           </a:p>
           <a:p>
             <a:pPr lvl="1"/>
             <a:r>
-              <a:rPr lang="en-US" smtClean="0"/>
+              <a:rPr lang="en-US"/>
               <a:t>Second level</a:t>
             </a:r>
           </a:p>
           <a:p>
             <a:pPr lvl="2"/>
             <a:r>
-              <a:rPr lang="en-US" smtClean="0"/>
+              <a:rPr lang="en-US"/>
               <a:t>Third level</a:t>
             </a:r>
           </a:p>
           <a:p>
             <a:pPr lvl="3"/>
             <a:r>
-              <a:rPr lang="en-US" smtClean="0"/>
+              <a:rPr lang="en-US"/>
               <a:t>Fourth level</a:t>
             </a:r>
           </a:p>
           <a:p>
             <a:pPr lvl="4"/>
             <a:r>
-              <a:rPr lang="en-US" smtClean="0"/>
+              <a:rPr lang="en-US"/>
               <a:t>Fifth level</a:t>
             </a:r>
-            <a:endParaRPr lang="en-US"/>
           </a:p>
         </p:txBody>
       </p:sp>
@@ -647,7 +658,7 @@
           <a:p>
             <a:fld id="{5BCAD085-E8A6-8845-BD4E-CB4CCA059FC4}" type="datetimeFigureOut">
               <a:rPr lang="en-US" smtClean="0"/>
-              <a:t>1/27/13</a:t>
+              <a:t>9/9/2026</a:t>
             </a:fld>
             <a:endParaRPr lang="en-US"/>
           </a:p>
@@ -741,10 +752,9 @@
           <a:lstStyle/>
           <a:p>
             <a:r>
-              <a:rPr lang="en-US" smtClean="0"/>
+              <a:rPr lang="en-US"/>
               <a:t>Click to edit Master title style</a:t>
             </a:r>
-            <a:endParaRPr lang="en-US"/>
           </a:p>
         </p:txBody>
       </p:sp>
@@ -765,38 +775,37 @@
           <a:p>
             <a:pPr lvl="0"/>
             <a:r>
-              <a:rPr lang="en-US" smtClean="0"/>
+              <a:rPr lang="en-US"/>
               <a:t>Click to edit Master text styles</a:t>
             </a:r>
           </a:p>
           <a:p>
             <a:pPr lvl="1"/>
             <a:r>
-              <a:rPr lang="en-US" smtClean="0"/>
+              <a:rPr lang="en-US"/>
               <a:t>Second level</a:t>
             </a:r>
           </a:p>
           <a:p>
             <a:pPr lvl="2"/>
             <a:r>
-              <a:rPr lang="en-US" smtClean="0"/>
+              <a:rPr lang="en-US"/>
               <a:t>Third level</a:t>
             </a:r>
           </a:p>
           <a:p>
             <a:pPr lvl="3"/>
             <a:r>
-              <a:rPr lang="en-US" smtClean="0"/>
+              <a:rPr lang="en-US"/>
               <a:t>Fourth level</a:t>
             </a:r>
           </a:p>
           <a:p>
             <a:pPr lvl="4"/>
             <a:r>
-              <a:rPr lang="en-US" smtClean="0"/>
+              <a:rPr lang="en-US"/>
               <a:t>Fifth level</a:t>
             </a:r>
-            <a:endParaRPr lang="en-US"/>
           </a:p>
         </p:txBody>
       </p:sp>
@@ -817,7 +826,7 @@
           <a:p>
             <a:fld id="{5BCAD085-E8A6-8845-BD4E-CB4CCA059FC4}" type="datetimeFigureOut">
               <a:rPr lang="en-US" smtClean="0"/>
-              <a:t>1/27/13</a:t>
+              <a:t>9/9/2026</a:t>
             </a:fld>
             <a:endParaRPr lang="en-US"/>
           </a:p>
@@ -920,10 +929,9 @@
           </a:lstStyle>
           <a:p>
             <a:r>
-              <a:rPr lang="en-US" smtClean="0"/>
+              <a:rPr lang="en-US"/>
               <a:t>Click to edit Master title style</a:t>
             </a:r>
-            <a:endParaRPr lang="en-US"/>
           </a:p>
         </p:txBody>
       </p:sp>
@@ -1040,7 +1048,7 @@
           <a:p>
             <a:pPr lvl="0"/>
             <a:r>
-              <a:rPr lang="en-US" smtClean="0"/>
+              <a:rPr lang="en-US"/>
               <a:t>Click to edit Master text styles</a:t>
             </a:r>
           </a:p>
@@ -1063,7 +1071,7 @@
           <a:p>
             <a:fld id="{5BCAD085-E8A6-8845-BD4E-CB4CCA059FC4}" type="datetimeFigureOut">
               <a:rPr lang="en-US" smtClean="0"/>
-              <a:t>1/27/13</a:t>
+              <a:t>9/9/2026</a:t>
             </a:fld>
             <a:endParaRPr lang="en-US"/>
           </a:p>
@@ -1157,10 +1165,9 @@
           <a:lstStyle/>
           <a:p>
             <a:r>
-              <a:rPr lang="en-US" smtClean="0"/>
+              <a:rPr lang="en-US"/>
               <a:t>Click to edit Master title style</a:t>
             </a:r>
-            <a:endParaRPr lang="en-US"/>
           </a:p>
         </p:txBody>
       </p:sp>
@@ -1214,38 +1221,37 @@
           <a:p>
             <a:pPr lvl="0"/>
             <a:r>
-              <a:rPr lang="en-US" smtClean="0"/>
+              <a:rPr lang="en-US"/>
               <a:t>Click to edit Master text styles</a:t>
             </a:r>
           </a:p>
           <a:p>
             <a:pPr lvl="1"/>
             <a:r>
-              <a:rPr lang="en-US" smtClean="0"/>
+              <a:rPr lang="en-US"/>
               <a:t>Second level</a:t>
             </a:r>
           </a:p>
           <a:p>
             <a:pPr lvl="2"/>
             <a:r>
-              <a:rPr lang="en-US" smtClean="0"/>
+              <a:rPr lang="en-US"/>
               <a:t>Third level</a:t>
             </a:r>
           </a:p>
           <a:p>
             <a:pPr lvl="3"/>
             <a:r>
-              <a:rPr lang="en-US" smtClean="0"/>
+              <a:rPr lang="en-US"/>
               <a:t>Fourth level</a:t>
             </a:r>
           </a:p>
           <a:p>
             <a:pPr lvl="4"/>
             <a:r>
-              <a:rPr lang="en-US" smtClean="0"/>
+              <a:rPr lang="en-US"/>
               <a:t>Fifth level</a:t>
             </a:r>
-            <a:endParaRPr lang="en-US"/>
           </a:p>
         </p:txBody>
       </p:sp>
@@ -1299,38 +1305,37 @@
           <a:p>
             <a:pPr lvl="0"/>
             <a:r>
-              <a:rPr lang="en-US" smtClean="0"/>
+              <a:rPr lang="en-US"/>
               <a:t>Click to edit Master text styles</a:t>
             </a:r>
           </a:p>
           <a:p>
             <a:pPr lvl="1"/>
             <a:r>
-              <a:rPr lang="en-US" smtClean="0"/>
+              <a:rPr lang="en-US"/>
               <a:t>Second level</a:t>
             </a:r>
           </a:p>
           <a:p>
             <a:pPr lvl="2"/>
             <a:r>
-              <a:rPr lang="en-US" smtClean="0"/>
+              <a:rPr lang="en-US"/>
               <a:t>Third level</a:t>
             </a:r>
           </a:p>
           <a:p>
             <a:pPr lvl="3"/>
             <a:r>
-              <a:rPr lang="en-US" smtClean="0"/>
+              <a:rPr lang="en-US"/>
               <a:t>Fourth level</a:t>
             </a:r>
           </a:p>
           <a:p>
             <a:pPr lvl="4"/>
             <a:r>
-              <a:rPr lang="en-US" smtClean="0"/>
+              <a:rPr lang="en-US"/>
               <a:t>Fifth level</a:t>
             </a:r>
-            <a:endParaRPr lang="en-US"/>
           </a:p>
         </p:txBody>
       </p:sp>
@@ -1351,7 +1356,7 @@
           <a:p>
             <a:fld id="{5BCAD085-E8A6-8845-BD4E-CB4CCA059FC4}" type="datetimeFigureOut">
               <a:rPr lang="en-US" smtClean="0"/>
-              <a:t>1/27/13</a:t>
+              <a:t>9/9/2026</a:t>
             </a:fld>
             <a:endParaRPr lang="en-US"/>
           </a:p>
@@ -1449,10 +1454,9 @@
           </a:lstStyle>
           <a:p>
             <a:r>
-              <a:rPr lang="en-US" smtClean="0"/>
+              <a:rPr lang="en-US"/>
               <a:t>Click to edit Master title style</a:t>
             </a:r>
-            <a:endParaRPr lang="en-US"/>
           </a:p>
         </p:txBody>
       </p:sp>
@@ -1515,7 +1519,7 @@
           <a:p>
             <a:pPr lvl="0"/>
             <a:r>
-              <a:rPr lang="en-US" smtClean="0"/>
+              <a:rPr lang="en-US"/>
               <a:t>Click to edit Master text styles</a:t>
             </a:r>
           </a:p>
@@ -1571,38 +1575,37 @@
           <a:p>
             <a:pPr lvl="0"/>
             <a:r>
-              <a:rPr lang="en-US" smtClean="0"/>
+              <a:rPr lang="en-US"/>
               <a:t>Click to edit Master text styles</a:t>
             </a:r>
           </a:p>
           <a:p>
             <a:pPr lvl="1"/>
             <a:r>
-              <a:rPr lang="en-US" smtClean="0"/>
+              <a:rPr lang="en-US"/>
               <a:t>Second level</a:t>
             </a:r>
           </a:p>
           <a:p>
             <a:pPr lvl="2"/>
             <a:r>
-              <a:rPr lang="en-US" smtClean="0"/>
+              <a:rPr lang="en-US"/>
               <a:t>Third level</a:t>
             </a:r>
           </a:p>
           <a:p>
             <a:pPr lvl="3"/>
             <a:r>
-              <a:rPr lang="en-US" smtClean="0"/>
+              <a:rPr lang="en-US"/>
               <a:t>Fourth level</a:t>
             </a:r>
           </a:p>
           <a:p>
             <a:pPr lvl="4"/>
             <a:r>
-              <a:rPr lang="en-US" smtClean="0"/>
+              <a:rPr lang="en-US"/>
               <a:t>Fifth level</a:t>
             </a:r>
-            <a:endParaRPr lang="en-US"/>
           </a:p>
         </p:txBody>
       </p:sp>
@@ -1665,7 +1668,7 @@
           <a:p>
             <a:pPr lvl="0"/>
             <a:r>
-              <a:rPr lang="en-US" smtClean="0"/>
+              <a:rPr lang="en-US"/>
               <a:t>Click to edit Master text styles</a:t>
             </a:r>
           </a:p>
@@ -1721,38 +1724,37 @@
           <a:p>
             <a:pPr lvl="0"/>
             <a:r>
-              <a:rPr lang="en-US" smtClean="0"/>
+              <a:rPr lang="en-US"/>
               <a:t>Click to edit Master text styles</a:t>
             </a:r>
           </a:p>
           <a:p>
             <a:pPr lvl="1"/>
             <a:r>
-              <a:rPr lang="en-US" smtClean="0"/>
+              <a:rPr lang="en-US"/>
               <a:t>Second level</a:t>
             </a:r>
           </a:p>
           <a:p>
             <a:pPr lvl="2"/>
             <a:r>
-              <a:rPr lang="en-US" smtClean="0"/>
+              <a:rPr lang="en-US"/>
               <a:t>Third level</a:t>
             </a:r>
           </a:p>
           <a:p>
             <a:pPr lvl="3"/>
             <a:r>
-              <a:rPr lang="en-US" smtClean="0"/>
+              <a:rPr lang="en-US"/>
               <a:t>Fourth level</a:t>
             </a:r>
           </a:p>
           <a:p>
             <a:pPr lvl="4"/>
             <a:r>
-              <a:rPr lang="en-US" smtClean="0"/>
+              <a:rPr lang="en-US"/>
               <a:t>Fifth level</a:t>
             </a:r>
-            <a:endParaRPr lang="en-US"/>
           </a:p>
         </p:txBody>
       </p:sp>
@@ -1773,7 +1775,7 @@
           <a:p>
             <a:fld id="{5BCAD085-E8A6-8845-BD4E-CB4CCA059FC4}" type="datetimeFigureOut">
               <a:rPr lang="en-US" smtClean="0"/>
-              <a:t>1/27/13</a:t>
+              <a:t>9/9/2026</a:t>
             </a:fld>
             <a:endParaRPr lang="en-US"/>
           </a:p>
@@ -1867,10 +1869,9 @@
           <a:lstStyle/>
           <a:p>
             <a:r>
-              <a:rPr lang="en-US" smtClean="0"/>
+              <a:rPr lang="en-US"/>
               <a:t>Click to edit Master title style</a:t>
             </a:r>
-            <a:endParaRPr lang="en-US"/>
           </a:p>
         </p:txBody>
       </p:sp>
@@ -1891,7 +1892,7 @@
           <a:p>
             <a:fld id="{5BCAD085-E8A6-8845-BD4E-CB4CCA059FC4}" type="datetimeFigureOut">
               <a:rPr lang="en-US" smtClean="0"/>
-              <a:t>1/27/13</a:t>
+              <a:t>9/9/2026</a:t>
             </a:fld>
             <a:endParaRPr lang="en-US"/>
           </a:p>
@@ -1986,7 +1987,7 @@
           <a:p>
             <a:fld id="{5BCAD085-E8A6-8845-BD4E-CB4CCA059FC4}" type="datetimeFigureOut">
               <a:rPr lang="en-US" smtClean="0"/>
-              <a:t>1/27/13</a:t>
+              <a:t>9/9/2026</a:t>
             </a:fld>
             <a:endParaRPr lang="en-US"/>
           </a:p>
@@ -2089,10 +2090,9 @@
           </a:lstStyle>
           <a:p>
             <a:r>
-              <a:rPr lang="en-US" smtClean="0"/>
+              <a:rPr lang="en-US"/>
               <a:t>Click to edit Master title style</a:t>
             </a:r>
-            <a:endParaRPr lang="en-US"/>
           </a:p>
         </p:txBody>
       </p:sp>
@@ -2146,38 +2146,37 @@
           <a:p>
             <a:pPr lvl="0"/>
             <a:r>
-              <a:rPr lang="en-US" smtClean="0"/>
+              <a:rPr lang="en-US"/>
               <a:t>Click to edit Master text styles</a:t>
             </a:r>
           </a:p>
           <a:p>
             <a:pPr lvl="1"/>
             <a:r>
-              <a:rPr lang="en-US" smtClean="0"/>
+              <a:rPr lang="en-US"/>
               <a:t>Second level</a:t>
             </a:r>
           </a:p>
           <a:p>
             <a:pPr lvl="2"/>
             <a:r>
-              <a:rPr lang="en-US" smtClean="0"/>
+              <a:rPr lang="en-US"/>
               <a:t>Third level</a:t>
             </a:r>
           </a:p>
           <a:p>
             <a:pPr lvl="3"/>
             <a:r>
-              <a:rPr lang="en-US" smtClean="0"/>
+              <a:rPr lang="en-US"/>
               <a:t>Fourth level</a:t>
             </a:r>
           </a:p>
           <a:p>
             <a:pPr lvl="4"/>
             <a:r>
-              <a:rPr lang="en-US" smtClean="0"/>
+              <a:rPr lang="en-US"/>
               <a:t>Fifth level</a:t>
             </a:r>
-            <a:endParaRPr lang="en-US"/>
           </a:p>
         </p:txBody>
       </p:sp>
@@ -2240,7 +2239,7 @@
           <a:p>
             <a:pPr lvl="0"/>
             <a:r>
-              <a:rPr lang="en-US" smtClean="0"/>
+              <a:rPr lang="en-US"/>
               <a:t>Click to edit Master text styles</a:t>
             </a:r>
           </a:p>
@@ -2263,7 +2262,7 @@
           <a:p>
             <a:fld id="{5BCAD085-E8A6-8845-BD4E-CB4CCA059FC4}" type="datetimeFigureOut">
               <a:rPr lang="en-US" smtClean="0"/>
-              <a:t>1/27/13</a:t>
+              <a:t>9/9/2026</a:t>
             </a:fld>
             <a:endParaRPr lang="en-US"/>
           </a:p>
@@ -2366,10 +2365,9 @@
           </a:lstStyle>
           <a:p>
             <a:r>
-              <a:rPr lang="en-US" smtClean="0"/>
+              <a:rPr lang="en-US"/>
               <a:t>Click to edit Master title style</a:t>
             </a:r>
-            <a:endParaRPr lang="en-US"/>
           </a:p>
         </p:txBody>
       </p:sp>
@@ -2493,7 +2491,7 @@
           <a:p>
             <a:pPr lvl="0"/>
             <a:r>
-              <a:rPr lang="en-US" smtClean="0"/>
+              <a:rPr lang="en-US"/>
               <a:t>Click to edit Master text styles</a:t>
             </a:r>
           </a:p>
@@ -2516,7 +2514,7 @@
           <a:p>
             <a:fld id="{5BCAD085-E8A6-8845-BD4E-CB4CCA059FC4}" type="datetimeFigureOut">
               <a:rPr lang="en-US" smtClean="0"/>
-              <a:t>1/27/13</a:t>
+              <a:t>9/9/2026</a:t>
             </a:fld>
             <a:endParaRPr lang="en-US"/>
           </a:p>
@@ -2625,10 +2623,9 @@
           <a:lstStyle/>
           <a:p>
             <a:r>
-              <a:rPr lang="en-US" smtClean="0"/>
+              <a:rPr lang="en-US"/>
               <a:t>Click to edit Master title style</a:t>
             </a:r>
-            <a:endParaRPr lang="en-US"/>
           </a:p>
         </p:txBody>
       </p:sp>
@@ -2659,38 +2656,37 @@
           <a:p>
             <a:pPr lvl="0"/>
             <a:r>
-              <a:rPr lang="en-US" smtClean="0"/>
+              <a:rPr lang="en-US"/>
               <a:t>Click to edit Master text styles</a:t>
             </a:r>
           </a:p>
           <a:p>
             <a:pPr lvl="1"/>
             <a:r>
-              <a:rPr lang="en-US" smtClean="0"/>
+              <a:rPr lang="en-US"/>
               <a:t>Second level</a:t>
             </a:r>
           </a:p>
           <a:p>
             <a:pPr lvl="2"/>
             <a:r>
-              <a:rPr lang="en-US" smtClean="0"/>
+              <a:rPr lang="en-US"/>
               <a:t>Third level</a:t>
             </a:r>
           </a:p>
           <a:p>
             <a:pPr lvl="3"/>
             <a:r>
-              <a:rPr lang="en-US" smtClean="0"/>
+              <a:rPr lang="en-US"/>
               <a:t>Fourth level</a:t>
             </a:r>
           </a:p>
           <a:p>
             <a:pPr lvl="4"/>
             <a:r>
-              <a:rPr lang="en-US" smtClean="0"/>
+              <a:rPr lang="en-US"/>
               <a:t>Fifth level</a:t>
             </a:r>
-            <a:endParaRPr lang="en-US"/>
           </a:p>
         </p:txBody>
       </p:sp>
@@ -2729,7 +2725,7 @@
           <a:p>
             <a:fld id="{5BCAD085-E8A6-8845-BD4E-CB4CCA059FC4}" type="datetimeFigureOut">
               <a:rPr lang="en-US" smtClean="0"/>
-              <a:t>1/27/13</a:t>
+              <a:t>9/9/2026</a:t>
             </a:fld>
             <a:endParaRPr lang="en-US"/>
           </a:p>
@@ -3088,7 +3084,7 @@
 </file>
 
 <file path=ppt/slides/slide1.xml><?xml version="1.0" encoding="utf-8"?>
-<p:sld xmlns:a="http://schemas.openxmlformats.org/drawingml/2006/main" xmlns:p="http://schemas.openxmlformats.org/presentationml/2006/main" xmlns:r="http://schemas.openxmlformats.org/officeDocument/2006/relationships">
+<p:sld xmlns:a="http://schemas.openxmlformats.org/drawingml/2006/main" xmlns:r="http://schemas.openxmlformats.org/officeDocument/2006/relationships" xmlns:p="http://schemas.openxmlformats.org/presentationml/2006/main">
   <p:cSld>
     <p:bg>
       <p:bgPr>
@@ -3104,7 +3100,14 @@
         <p:cNvGrpSpPr/>
         <p:nvPr/>
       </p:nvGrpSpPr>
-      <p:grpSpPr/>
+      <p:grpSpPr>
+        <a:xfrm>
+          <a:off x="0" y="0"/>
+          <a:ext cx="0" cy="0"/>
+          <a:chOff x="0" y="0"/>
+          <a:chExt cx="0" cy="0"/>
+        </a:xfrm>
+      </p:grpSpPr>
       <p:sp>
         <p:nvSpPr>
           <p:cNvPr id="2" name="TextBox 1"/>
@@ -3122,7 +3125,7 @@
           <a:noFill/>
         </p:spPr>
         <p:txBody>
-          <a:bodyPr wrap="square" anchor="t" lIns="0" rIns="0" tIns="0" bIns="0">
+          <a:bodyPr wrap="square" lIns="0" tIns="0" rIns="0" bIns="0" anchor="t">
             <a:spAutoFit/>
           </a:bodyPr>
           <a:lstStyle/>
@@ -3164,7 +3167,7 @@
           <a:noFill/>
         </p:spPr>
         <p:txBody>
-          <a:bodyPr wrap="square" anchor="t" lIns="0" rIns="0" tIns="0" bIns="0">
+          <a:bodyPr wrap="square" lIns="0" tIns="0" rIns="0" bIns="0" anchor="t">
             <a:spAutoFit/>
           </a:bodyPr>
           <a:lstStyle/>
@@ -3207,7 +3210,7 @@
           <a:noFill/>
         </p:spPr>
         <p:txBody>
-          <a:bodyPr wrap="square" anchor="t" lIns="0" rIns="0" tIns="0" bIns="0">
+          <a:bodyPr wrap="square" lIns="0" tIns="0" rIns="0" bIns="0" anchor="t">
             <a:spAutoFit/>
           </a:bodyPr>
           <a:lstStyle/>
@@ -3274,6 +3277,7 @@
           <a:lstStyle/>
           <a:p>
             <a:pPr algn="ctr"/>
+            <a:endParaRPr/>
           </a:p>
         </p:txBody>
       </p:sp>
@@ -3294,7 +3298,7 @@
           <a:noFill/>
         </p:spPr>
         <p:txBody>
-          <a:bodyPr wrap="square" anchor="t" lIns="0" rIns="0" tIns="0" bIns="0">
+          <a:bodyPr wrap="square" lIns="0" tIns="0" rIns="0" bIns="0" anchor="t">
             <a:spAutoFit/>
           </a:bodyPr>
           <a:lstStyle/>
@@ -3336,7 +3340,7 @@
           <a:noFill/>
         </p:spPr>
         <p:txBody>
-          <a:bodyPr wrap="square" anchor="t" lIns="0" rIns="0" tIns="0" bIns="0">
+          <a:bodyPr wrap="square" lIns="0" tIns="0" rIns="0" bIns="0" anchor="t">
             <a:spAutoFit/>
           </a:bodyPr>
           <a:lstStyle/>
@@ -3378,7 +3382,7 @@
           <a:noFill/>
         </p:spPr>
         <p:txBody>
-          <a:bodyPr wrap="square" anchor="t" lIns="0" rIns="0" tIns="0" bIns="0">
+          <a:bodyPr wrap="square" lIns="0" tIns="0" rIns="0" bIns="0" anchor="t">
             <a:spAutoFit/>
           </a:bodyPr>
           <a:lstStyle/>
@@ -3445,6 +3449,7 @@
           <a:lstStyle/>
           <a:p>
             <a:pPr algn="ctr"/>
+            <a:endParaRPr/>
           </a:p>
         </p:txBody>
       </p:sp>
@@ -3465,7 +3470,7 @@
           <a:noFill/>
         </p:spPr>
         <p:txBody>
-          <a:bodyPr wrap="square" anchor="t" lIns="0" rIns="0" tIns="0" bIns="0">
+          <a:bodyPr wrap="square" lIns="0" tIns="0" rIns="0" bIns="0" anchor="t">
             <a:spAutoFit/>
           </a:bodyPr>
           <a:lstStyle/>
@@ -3507,7 +3512,7 @@
           <a:noFill/>
         </p:spPr>
         <p:txBody>
-          <a:bodyPr wrap="square" anchor="t" lIns="0" rIns="0" tIns="0" bIns="0">
+          <a:bodyPr wrap="square" lIns="0" tIns="0" rIns="0" bIns="0" anchor="t">
             <a:spAutoFit/>
           </a:bodyPr>
           <a:lstStyle/>
@@ -3549,7 +3554,7 @@
           <a:noFill/>
         </p:spPr>
         <p:txBody>
-          <a:bodyPr wrap="square" anchor="t" lIns="0" rIns="0" tIns="0" bIns="0">
+          <a:bodyPr wrap="square" lIns="0" tIns="0" rIns="0" bIns="0" anchor="t">
             <a:spAutoFit/>
           </a:bodyPr>
           <a:lstStyle/>
@@ -3616,6 +3621,7 @@
           <a:lstStyle/>
           <a:p>
             <a:pPr algn="ctr"/>
+            <a:endParaRPr/>
           </a:p>
         </p:txBody>
       </p:sp>
@@ -3636,7 +3642,7 @@
           <a:noFill/>
         </p:spPr>
         <p:txBody>
-          <a:bodyPr wrap="square" anchor="t" lIns="0" rIns="0" tIns="0" bIns="0">
+          <a:bodyPr wrap="square" lIns="0" tIns="0" rIns="0" bIns="0" anchor="t">
             <a:spAutoFit/>
           </a:bodyPr>
           <a:lstStyle/>
@@ -3678,7 +3684,7 @@
           <a:noFill/>
         </p:spPr>
         <p:txBody>
-          <a:bodyPr wrap="square" anchor="t" lIns="0" rIns="0" tIns="0" bIns="0">
+          <a:bodyPr wrap="square" lIns="0" tIns="0" rIns="0" bIns="0" anchor="t">
             <a:spAutoFit/>
           </a:bodyPr>
           <a:lstStyle/>
@@ -3720,7 +3726,7 @@
           <a:noFill/>
         </p:spPr>
         <p:txBody>
-          <a:bodyPr wrap="square" anchor="t" lIns="0" rIns="0" tIns="0" bIns="0">
+          <a:bodyPr wrap="square" lIns="0" tIns="0" rIns="0" bIns="0" anchor="t">
             <a:spAutoFit/>
           </a:bodyPr>
           <a:lstStyle/>
@@ -3762,7 +3768,7 @@
           <a:noFill/>
         </p:spPr>
         <p:txBody>
-          <a:bodyPr wrap="square" anchor="t" lIns="0" rIns="0" tIns="0" bIns="0">
+          <a:bodyPr wrap="square" lIns="0" tIns="0" rIns="0" bIns="0" anchor="t">
             <a:spAutoFit/>
           </a:bodyPr>
           <a:lstStyle/>
@@ -3804,7 +3810,7 @@
           <a:noFill/>
         </p:spPr>
         <p:txBody>
-          <a:bodyPr wrap="square" anchor="t" lIns="0" rIns="0" tIns="0" bIns="0">
+          <a:bodyPr wrap="square" lIns="0" tIns="0" rIns="0" bIns="0" anchor="t">
             <a:spAutoFit/>
           </a:bodyPr>
           <a:lstStyle/>
@@ -3838,15 +3844,15 @@
         <p:spPr>
           <a:xfrm>
             <a:off x="11082528" y="6537960"/>
-            <a:ext cx="411480" cy="164592"/>
-          </a:xfrm>
-          <a:prstGeom prst="rect">
-            <a:avLst/>
-          </a:prstGeom>
-          <a:noFill/>
-        </p:spPr>
-        <p:txBody>
-          <a:bodyPr wrap="square" anchor="t" lIns="0" rIns="0" tIns="0" bIns="0">
+            <a:ext cx="411480" cy="123111"/>
+          </a:xfrm>
+          <a:prstGeom prst="rect">
+            <a:avLst/>
+          </a:prstGeom>
+          <a:noFill/>
+        </p:spPr>
+        <p:txBody>
+          <a:bodyPr wrap="square" lIns="0" tIns="0" rIns="0" bIns="0" anchor="t">
             <a:spAutoFit/>
           </a:bodyPr>
           <a:lstStyle/>
@@ -3860,7 +3866,7 @@
               </a:spcAft>
             </a:pPr>
             <a:r>
-              <a:rPr sz="800" b="1">
+              <a:rPr lang="en-US" sz="800" b="1">
                 <a:solidFill>
                   <a:srgbClr val="98A1A0"/>
                 </a:solidFill>
@@ -3868,6 +3874,12 @@
               </a:rPr>
               <a:t>01</a:t>
             </a:r>
+            <a:endParaRPr sz="800" b="1">
+              <a:solidFill>
+                <a:srgbClr val="98A1A0"/>
+              </a:solidFill>
+              <a:latin typeface="Aptos"/>
+            </a:endParaRPr>
           </a:p>
         </p:txBody>
       </p:sp>
@@ -3880,7 +3892,772 @@
 </file>
 
 <file path=ppt/slides/slide10.xml><?xml version="1.0" encoding="utf-8"?>
-<p:sld xmlns:a="http://schemas.openxmlformats.org/drawingml/2006/main" xmlns:p="http://schemas.openxmlformats.org/presentationml/2006/main" xmlns:r="http://schemas.openxmlformats.org/officeDocument/2006/relationships">
+<p:sld xmlns:a="http://schemas.openxmlformats.org/drawingml/2006/main" xmlns:r="http://schemas.openxmlformats.org/officeDocument/2006/relationships" xmlns:p="http://schemas.openxmlformats.org/presentationml/2006/main">
+  <p:cSld>
+    <p:bg>
+      <p:bgPr>
+        <a:solidFill>
+          <a:srgbClr val="FFFFFF"/>
+        </a:solidFill>
+        <a:effectLst/>
+      </p:bgPr>
+    </p:bg>
+    <p:spTree>
+      <p:nvGrpSpPr>
+        <p:cNvPr id="1" name=""/>
+        <p:cNvGrpSpPr/>
+        <p:nvPr/>
+      </p:nvGrpSpPr>
+      <p:grpSpPr>
+        <a:xfrm>
+          <a:off x="0" y="0"/>
+          <a:ext cx="0" cy="0"/>
+          <a:chOff x="0" y="0"/>
+          <a:chExt cx="0" cy="0"/>
+        </a:xfrm>
+      </p:grpSpPr>
+      <p:sp>
+        <p:nvSpPr>
+          <p:cNvPr id="2" name="TextBox 1"/>
+          <p:cNvSpPr txBox="1"/>
+          <p:nvPr/>
+        </p:nvSpPr>
+        <p:spPr>
+          <a:xfrm>
+            <a:off x="658368" y="347472"/>
+            <a:ext cx="6583680" cy="228600"/>
+          </a:xfrm>
+          <a:prstGeom prst="rect">
+            <a:avLst/>
+          </a:prstGeom>
+          <a:noFill/>
+        </p:spPr>
+        <p:txBody>
+          <a:bodyPr wrap="square" lIns="0" tIns="0" rIns="0" bIns="0" anchor="t">
+            <a:spAutoFit/>
+          </a:bodyPr>
+          <a:lstStyle/>
+          <a:p>
+            <a:pPr algn="l">
+              <a:lnSpc>
+                <a:spcPct val="100000"/>
+              </a:lnSpc>
+              <a:spcAft>
+                <a:spcPts val="0"/>
+              </a:spcAft>
+            </a:pPr>
+            <a:r>
+              <a:rPr sz="1000" b="1">
+                <a:solidFill>
+                  <a:srgbClr val="00766C"/>
+                </a:solidFill>
+                <a:latin typeface="Aptos"/>
+              </a:rPr>
+              <a:t>LIVE DEMO</a:t>
+            </a:r>
+          </a:p>
+        </p:txBody>
+      </p:sp>
+      <p:sp>
+        <p:nvSpPr>
+          <p:cNvPr id="3" name="TextBox 2"/>
+          <p:cNvSpPr txBox="1"/>
+          <p:nvPr/>
+        </p:nvSpPr>
+        <p:spPr>
+          <a:xfrm>
+            <a:off x="658368" y="713232"/>
+            <a:ext cx="10789920" cy="566928"/>
+          </a:xfrm>
+          <a:prstGeom prst="rect">
+            <a:avLst/>
+          </a:prstGeom>
+          <a:noFill/>
+        </p:spPr>
+        <p:txBody>
+          <a:bodyPr wrap="square" lIns="0" tIns="0" rIns="0" bIns="0" anchor="t">
+            <a:spAutoFit/>
+          </a:bodyPr>
+          <a:lstStyle/>
+          <a:p>
+            <a:pPr algn="l">
+              <a:lnSpc>
+                <a:spcPct val="100000"/>
+              </a:lnSpc>
+              <a:spcAft>
+                <a:spcPts val="0"/>
+              </a:spcAft>
+            </a:pPr>
+            <a:r>
+              <a:rPr sz="3100" b="1">
+                <a:solidFill>
+                  <a:srgbClr val="181D22"/>
+                </a:solidFill>
+                <a:latin typeface="Aptos Display"/>
+              </a:rPr>
+              <a:t>From empty folder to working project in just a few prompts.</a:t>
+            </a:r>
+          </a:p>
+        </p:txBody>
+      </p:sp>
+      <p:sp>
+        <p:nvSpPr>
+          <p:cNvPr id="4" name="TextBox 3"/>
+          <p:cNvSpPr txBox="1"/>
+          <p:nvPr/>
+        </p:nvSpPr>
+        <p:spPr>
+          <a:xfrm>
+            <a:off x="658368" y="1335024"/>
+            <a:ext cx="10469880" cy="438912"/>
+          </a:xfrm>
+          <a:prstGeom prst="rect">
+            <a:avLst/>
+          </a:prstGeom>
+          <a:noFill/>
+        </p:spPr>
+        <p:txBody>
+          <a:bodyPr wrap="square" lIns="0" tIns="0" rIns="0" bIns="0" anchor="t">
+            <a:spAutoFit/>
+          </a:bodyPr>
+          <a:lstStyle/>
+          <a:p>
+            <a:pPr algn="l">
+              <a:lnSpc>
+                <a:spcPct val="100000"/>
+              </a:lnSpc>
+              <a:spcAft>
+                <a:spcPts val="0"/>
+              </a:spcAft>
+            </a:pPr>
+            <a:r>
+              <a:rPr sz="1400" b="0">
+                <a:solidFill>
+                  <a:srgbClr val="677074"/>
+                </a:solidFill>
+                <a:latin typeface="Aptos"/>
+              </a:rPr>
+              <a:t>The demo compresses the interaction; real work retains clarification and approval gates.</a:t>
+            </a:r>
+          </a:p>
+        </p:txBody>
+      </p:sp>
+      <p:sp>
+        <p:nvSpPr>
+          <p:cNvPr id="5" name="Rounded Rectangle 4"/>
+          <p:cNvSpPr/>
+          <p:nvPr/>
+        </p:nvSpPr>
+        <p:spPr>
+          <a:xfrm>
+            <a:off x="658368" y="2029968"/>
+            <a:ext cx="4892040" cy="3346704"/>
+          </a:xfrm>
+          <a:prstGeom prst="roundRect">
+            <a:avLst>
+              <a:gd name="adj" fmla="val 6000"/>
+            </a:avLst>
+          </a:prstGeom>
+          <a:solidFill>
+            <a:srgbClr val="181D22"/>
+          </a:solidFill>
+          <a:ln>
+            <a:noFill/>
+          </a:ln>
+        </p:spPr>
+        <p:style>
+          <a:lnRef idx="1">
+            <a:schemeClr val="accent1"/>
+          </a:lnRef>
+          <a:fillRef idx="3">
+            <a:schemeClr val="accent1"/>
+          </a:fillRef>
+          <a:effectRef idx="2">
+            <a:schemeClr val="accent1"/>
+          </a:effectRef>
+          <a:fontRef idx="minor">
+            <a:schemeClr val="lt1"/>
+          </a:fontRef>
+        </p:style>
+        <p:txBody>
+          <a:bodyPr rtlCol="0" anchor="ctr"/>
+          <a:lstStyle/>
+          <a:p>
+            <a:pPr algn="ctr"/>
+            <a:endParaRPr/>
+          </a:p>
+        </p:txBody>
+      </p:sp>
+      <p:sp>
+        <p:nvSpPr>
+          <p:cNvPr id="6" name="TextBox 5"/>
+          <p:cNvSpPr txBox="1"/>
+          <p:nvPr/>
+        </p:nvSpPr>
+        <p:spPr>
+          <a:xfrm>
+            <a:off x="932688" y="2304288"/>
+            <a:ext cx="4206240" cy="228600"/>
+          </a:xfrm>
+          <a:prstGeom prst="rect">
+            <a:avLst/>
+          </a:prstGeom>
+          <a:noFill/>
+        </p:spPr>
+        <p:txBody>
+          <a:bodyPr wrap="square" lIns="0" tIns="0" rIns="0" bIns="0" anchor="t">
+            <a:spAutoFit/>
+          </a:bodyPr>
+          <a:lstStyle/>
+          <a:p>
+            <a:pPr algn="l">
+              <a:lnSpc>
+                <a:spcPct val="100000"/>
+              </a:lnSpc>
+              <a:spcAft>
+                <a:spcPts val="0"/>
+              </a:spcAft>
+            </a:pPr>
+            <a:r>
+              <a:rPr sz="1000" b="1">
+                <a:solidFill>
+                  <a:srgbClr val="8DE1D1"/>
+                </a:solidFill>
+                <a:latin typeface="Aptos"/>
+              </a:rPr>
+              <a:t>PROMPT 01  /  ESTABLISH</a:t>
+            </a:r>
+          </a:p>
+        </p:txBody>
+      </p:sp>
+      <p:sp>
+        <p:nvSpPr>
+          <p:cNvPr id="7" name="TextBox 6"/>
+          <p:cNvSpPr txBox="1"/>
+          <p:nvPr/>
+        </p:nvSpPr>
+        <p:spPr>
+          <a:xfrm>
+            <a:off x="932688" y="2743200"/>
+            <a:ext cx="4251960" cy="320040"/>
+          </a:xfrm>
+          <a:prstGeom prst="rect">
+            <a:avLst/>
+          </a:prstGeom>
+          <a:noFill/>
+        </p:spPr>
+        <p:txBody>
+          <a:bodyPr wrap="square" lIns="0" tIns="0" rIns="0" bIns="0" anchor="t">
+            <a:spAutoFit/>
+          </a:bodyPr>
+          <a:lstStyle/>
+          <a:p>
+            <a:pPr algn="l">
+              <a:lnSpc>
+                <a:spcPct val="100000"/>
+              </a:lnSpc>
+              <a:spcAft>
+                <a:spcPts val="0"/>
+              </a:spcAft>
+            </a:pPr>
+            <a:r>
+              <a:rPr sz="1700" b="1">
+                <a:solidFill>
+                  <a:srgbClr val="FFFFFF"/>
+                </a:solidFill>
+                <a:latin typeface="Cascadia Mono"/>
+              </a:rPr>
+              <a:t>/demo-create-project</a:t>
+            </a:r>
+          </a:p>
+        </p:txBody>
+      </p:sp>
+      <p:sp>
+        <p:nvSpPr>
+          <p:cNvPr id="8" name="TextBox 7"/>
+          <p:cNvSpPr txBox="1"/>
+          <p:nvPr/>
+        </p:nvSpPr>
+        <p:spPr>
+          <a:xfrm>
+            <a:off x="932688" y="3383280"/>
+            <a:ext cx="4160520" cy="1024128"/>
+          </a:xfrm>
+          <a:prstGeom prst="rect">
+            <a:avLst/>
+          </a:prstGeom>
+          <a:noFill/>
+        </p:spPr>
+        <p:txBody>
+          <a:bodyPr wrap="square" lIns="0" tIns="0" rIns="0" bIns="0" anchor="t">
+            <a:spAutoFit/>
+          </a:bodyPr>
+          <a:lstStyle/>
+          <a:p>
+            <a:pPr algn="l">
+              <a:lnSpc>
+                <a:spcPct val="100000"/>
+              </a:lnSpc>
+              <a:spcAft>
+                <a:spcPts val="0"/>
+              </a:spcAft>
+            </a:pPr>
+            <a:r>
+              <a:rPr sz="1400" b="0">
+                <a:solidFill>
+                  <a:srgbClr val="DEE5E3"/>
+                </a:solidFill>
+                <a:latin typeface="Aptos"/>
+              </a:rPr>
+              <a:t>Create a TypeScript project with the durable profile, tests, and Azure scaffold; verify it, then open its workspace.</a:t>
+            </a:r>
+          </a:p>
+        </p:txBody>
+      </p:sp>
+      <p:sp>
+        <p:nvSpPr>
+          <p:cNvPr id="9" name="TextBox 8"/>
+          <p:cNvSpPr txBox="1"/>
+          <p:nvPr/>
+        </p:nvSpPr>
+        <p:spPr>
+          <a:xfrm>
+            <a:off x="932688" y="4818888"/>
+            <a:ext cx="4160520" cy="274320"/>
+          </a:xfrm>
+          <a:prstGeom prst="rect">
+            <a:avLst/>
+          </a:prstGeom>
+          <a:noFill/>
+        </p:spPr>
+        <p:txBody>
+          <a:bodyPr wrap="square" lIns="0" tIns="0" rIns="0" bIns="0" anchor="t">
+            <a:spAutoFit/>
+          </a:bodyPr>
+          <a:lstStyle/>
+          <a:p>
+            <a:pPr algn="l">
+              <a:lnSpc>
+                <a:spcPct val="100000"/>
+              </a:lnSpc>
+              <a:spcAft>
+                <a:spcPts val="0"/>
+              </a:spcAft>
+            </a:pPr>
+            <a:r>
+              <a:rPr sz="1000" b="1">
+                <a:solidFill>
+                  <a:srgbClr val="E7AD32"/>
+                </a:solidFill>
+                <a:latin typeface="Aptos"/>
+              </a:rPr>
+              <a:t>OUTPUT  -&gt;  GOVERNED WORKSPACE</a:t>
+            </a:r>
+          </a:p>
+        </p:txBody>
+      </p:sp>
+      <p:sp>
+        <p:nvSpPr>
+          <p:cNvPr id="10" name="Right Arrow 9"/>
+          <p:cNvSpPr/>
+          <p:nvPr/>
+        </p:nvSpPr>
+        <p:spPr>
+          <a:xfrm>
+            <a:off x="5715000" y="3337560"/>
+            <a:ext cx="676656" cy="411480"/>
+          </a:xfrm>
+          <a:prstGeom prst="rightArrow">
+            <a:avLst/>
+          </a:prstGeom>
+          <a:solidFill>
+            <a:srgbClr val="00766C"/>
+          </a:solidFill>
+          <a:ln>
+            <a:noFill/>
+          </a:ln>
+        </p:spPr>
+        <p:style>
+          <a:lnRef idx="1">
+            <a:schemeClr val="accent1"/>
+          </a:lnRef>
+          <a:fillRef idx="3">
+            <a:schemeClr val="accent1"/>
+          </a:fillRef>
+          <a:effectRef idx="2">
+            <a:schemeClr val="accent1"/>
+          </a:effectRef>
+          <a:fontRef idx="minor">
+            <a:schemeClr val="lt1"/>
+          </a:fontRef>
+        </p:style>
+        <p:txBody>
+          <a:bodyPr rtlCol="0" anchor="ctr"/>
+          <a:lstStyle/>
+          <a:p>
+            <a:pPr algn="ctr"/>
+            <a:endParaRPr/>
+          </a:p>
+        </p:txBody>
+      </p:sp>
+      <p:sp>
+        <p:nvSpPr>
+          <p:cNvPr id="11" name="Rounded Rectangle 10"/>
+          <p:cNvSpPr/>
+          <p:nvPr/>
+        </p:nvSpPr>
+        <p:spPr>
+          <a:xfrm>
+            <a:off x="6592824" y="2029968"/>
+            <a:ext cx="4928616" cy="3346704"/>
+          </a:xfrm>
+          <a:prstGeom prst="roundRect">
+            <a:avLst>
+              <a:gd name="adj" fmla="val 6000"/>
+            </a:avLst>
+          </a:prstGeom>
+          <a:solidFill>
+            <a:srgbClr val="F4F1E8"/>
+          </a:solidFill>
+          <a:ln w="25400">
+            <a:solidFill>
+              <a:srgbClr val="00766C"/>
+            </a:solidFill>
+          </a:ln>
+        </p:spPr>
+        <p:style>
+          <a:lnRef idx="1">
+            <a:schemeClr val="accent1"/>
+          </a:lnRef>
+          <a:fillRef idx="3">
+            <a:schemeClr val="accent1"/>
+          </a:fillRef>
+          <a:effectRef idx="2">
+            <a:schemeClr val="accent1"/>
+          </a:effectRef>
+          <a:fontRef idx="minor">
+            <a:schemeClr val="lt1"/>
+          </a:fontRef>
+        </p:style>
+        <p:txBody>
+          <a:bodyPr rtlCol="0" anchor="ctr"/>
+          <a:lstStyle/>
+          <a:p>
+            <a:pPr algn="ctr"/>
+            <a:endParaRPr/>
+          </a:p>
+        </p:txBody>
+      </p:sp>
+      <p:sp>
+        <p:nvSpPr>
+          <p:cNvPr id="12" name="TextBox 11"/>
+          <p:cNvSpPr txBox="1"/>
+          <p:nvPr/>
+        </p:nvSpPr>
+        <p:spPr>
+          <a:xfrm>
+            <a:off x="6876288" y="2304288"/>
+            <a:ext cx="4206240" cy="228600"/>
+          </a:xfrm>
+          <a:prstGeom prst="rect">
+            <a:avLst/>
+          </a:prstGeom>
+          <a:noFill/>
+        </p:spPr>
+        <p:txBody>
+          <a:bodyPr wrap="square" lIns="0" tIns="0" rIns="0" bIns="0" anchor="t">
+            <a:spAutoFit/>
+          </a:bodyPr>
+          <a:lstStyle/>
+          <a:p>
+            <a:pPr algn="l">
+              <a:lnSpc>
+                <a:spcPct val="100000"/>
+              </a:lnSpc>
+              <a:spcAft>
+                <a:spcPts val="0"/>
+              </a:spcAft>
+            </a:pPr>
+            <a:r>
+              <a:rPr sz="1000" b="1">
+                <a:solidFill>
+                  <a:srgbClr val="00766C"/>
+                </a:solidFill>
+                <a:latin typeface="Aptos"/>
+              </a:rPr>
+              <a:t>PROMPT 02  /  BUILD</a:t>
+            </a:r>
+          </a:p>
+        </p:txBody>
+      </p:sp>
+      <p:sp>
+        <p:nvSpPr>
+          <p:cNvPr id="13" name="TextBox 12"/>
+          <p:cNvSpPr txBox="1"/>
+          <p:nvPr/>
+        </p:nvSpPr>
+        <p:spPr>
+          <a:xfrm>
+            <a:off x="6876288" y="2743200"/>
+            <a:ext cx="4251960" cy="320040"/>
+          </a:xfrm>
+          <a:prstGeom prst="rect">
+            <a:avLst/>
+          </a:prstGeom>
+          <a:noFill/>
+        </p:spPr>
+        <p:txBody>
+          <a:bodyPr wrap="square" lIns="0" tIns="0" rIns="0" bIns="0" anchor="t">
+            <a:spAutoFit/>
+          </a:bodyPr>
+          <a:lstStyle/>
+          <a:p>
+            <a:pPr algn="l">
+              <a:lnSpc>
+                <a:spcPct val="100000"/>
+              </a:lnSpc>
+              <a:spcAft>
+                <a:spcPts val="0"/>
+              </a:spcAft>
+            </a:pPr>
+            <a:r>
+              <a:rPr sz="1700" b="1">
+                <a:solidFill>
+                  <a:srgbClr val="181D22"/>
+                </a:solidFill>
+                <a:latin typeface="Cascadia Mono"/>
+              </a:rPr>
+              <a:t>/demo-web-app</a:t>
+            </a:r>
+          </a:p>
+        </p:txBody>
+      </p:sp>
+      <p:sp>
+        <p:nvSpPr>
+          <p:cNvPr id="14" name="TextBox 13"/>
+          <p:cNvSpPr txBox="1"/>
+          <p:nvPr/>
+        </p:nvSpPr>
+        <p:spPr>
+          <a:xfrm>
+            <a:off x="6876288" y="3383280"/>
+            <a:ext cx="4160520" cy="1024128"/>
+          </a:xfrm>
+          <a:prstGeom prst="rect">
+            <a:avLst/>
+          </a:prstGeom>
+          <a:noFill/>
+        </p:spPr>
+        <p:txBody>
+          <a:bodyPr wrap="square" lIns="0" tIns="0" rIns="0" bIns="0" anchor="t">
+            <a:spAutoFit/>
+          </a:bodyPr>
+          <a:lstStyle/>
+          <a:p>
+            <a:pPr algn="l">
+              <a:lnSpc>
+                <a:spcPct val="100000"/>
+              </a:lnSpc>
+              <a:spcAft>
+                <a:spcPts val="0"/>
+              </a:spcAft>
+            </a:pPr>
+            <a:r>
+              <a:rPr sz="1400" b="0">
+                <a:solidFill>
+                  <a:srgbClr val="677074"/>
+                </a:solidFill>
+                <a:latin typeface="Aptos"/>
+              </a:rPr>
+              <a:t>Build and test the app inside that baseline; stop at the Azure deployment approval gate before any cloud mutation.</a:t>
+            </a:r>
+          </a:p>
+        </p:txBody>
+      </p:sp>
+      <p:sp>
+        <p:nvSpPr>
+          <p:cNvPr id="15" name="TextBox 14"/>
+          <p:cNvSpPr txBox="1"/>
+          <p:nvPr/>
+        </p:nvSpPr>
+        <p:spPr>
+          <a:xfrm>
+            <a:off x="6876288" y="4818888"/>
+            <a:ext cx="4160520" cy="274320"/>
+          </a:xfrm>
+          <a:prstGeom prst="rect">
+            <a:avLst/>
+          </a:prstGeom>
+          <a:noFill/>
+        </p:spPr>
+        <p:txBody>
+          <a:bodyPr wrap="square" lIns="0" tIns="0" rIns="0" bIns="0" anchor="t">
+            <a:spAutoFit/>
+          </a:bodyPr>
+          <a:lstStyle/>
+          <a:p>
+            <a:pPr algn="l">
+              <a:lnSpc>
+                <a:spcPct val="100000"/>
+              </a:lnSpc>
+              <a:spcAft>
+                <a:spcPts val="0"/>
+              </a:spcAft>
+            </a:pPr>
+            <a:r>
+              <a:rPr sz="1000" b="1">
+                <a:solidFill>
+                  <a:srgbClr val="F06A4A"/>
+                </a:solidFill>
+                <a:latin typeface="Aptos"/>
+              </a:rPr>
+              <a:t>OUTPUT  -&gt;  WORKING, EVIDENCED APP</a:t>
+            </a:r>
+          </a:p>
+        </p:txBody>
+      </p:sp>
+      <p:sp>
+        <p:nvSpPr>
+          <p:cNvPr id="16" name="TextBox 15"/>
+          <p:cNvSpPr txBox="1"/>
+          <p:nvPr/>
+        </p:nvSpPr>
+        <p:spPr>
+          <a:xfrm>
+            <a:off x="658368" y="5779008"/>
+            <a:ext cx="10863072" cy="320040"/>
+          </a:xfrm>
+          <a:prstGeom prst="rect">
+            <a:avLst/>
+          </a:prstGeom>
+          <a:noFill/>
+        </p:spPr>
+        <p:txBody>
+          <a:bodyPr wrap="square" lIns="0" tIns="0" rIns="0" bIns="0" anchor="t">
+            <a:spAutoFit/>
+          </a:bodyPr>
+          <a:lstStyle/>
+          <a:p>
+            <a:pPr algn="ctr">
+              <a:lnSpc>
+                <a:spcPct val="100000"/>
+              </a:lnSpc>
+              <a:spcAft>
+                <a:spcPts val="0"/>
+              </a:spcAft>
+            </a:pPr>
+            <a:r>
+              <a:rPr sz="1300" b="1">
+                <a:solidFill>
+                  <a:srgbClr val="181D22"/>
+                </a:solidFill>
+                <a:latin typeface="Aptos"/>
+              </a:rPr>
+              <a:t>The product starts the project. GitHub Copilot and the team build the application inside it.</a:t>
+            </a:r>
+          </a:p>
+        </p:txBody>
+      </p:sp>
+      <p:sp>
+        <p:nvSpPr>
+          <p:cNvPr id="17" name="TextBox 16"/>
+          <p:cNvSpPr txBox="1"/>
+          <p:nvPr/>
+        </p:nvSpPr>
+        <p:spPr>
+          <a:xfrm>
+            <a:off x="658368" y="6537960"/>
+            <a:ext cx="3657600" cy="164592"/>
+          </a:xfrm>
+          <a:prstGeom prst="rect">
+            <a:avLst/>
+          </a:prstGeom>
+          <a:noFill/>
+        </p:spPr>
+        <p:txBody>
+          <a:bodyPr wrap="square" lIns="0" tIns="0" rIns="0" bIns="0" anchor="t">
+            <a:spAutoFit/>
+          </a:bodyPr>
+          <a:lstStyle/>
+          <a:p>
+            <a:pPr algn="l">
+              <a:lnSpc>
+                <a:spcPct val="100000"/>
+              </a:lnSpc>
+              <a:spcAft>
+                <a:spcPts val="0"/>
+              </a:spcAft>
+            </a:pPr>
+            <a:r>
+              <a:rPr sz="800" b="1">
+                <a:solidFill>
+                  <a:srgbClr val="677074"/>
+                </a:solidFill>
+                <a:latin typeface="Aptos"/>
+              </a:rPr>
+              <a:t>PROJECT ORCHESTRATOR</a:t>
+            </a:r>
+          </a:p>
+        </p:txBody>
+      </p:sp>
+      <p:sp>
+        <p:nvSpPr>
+          <p:cNvPr id="18" name="TextBox 17"/>
+          <p:cNvSpPr txBox="1"/>
+          <p:nvPr/>
+        </p:nvSpPr>
+        <p:spPr>
+          <a:xfrm>
+            <a:off x="11082528" y="6537960"/>
+            <a:ext cx="411480" cy="123111"/>
+          </a:xfrm>
+          <a:prstGeom prst="rect">
+            <a:avLst/>
+          </a:prstGeom>
+          <a:noFill/>
+        </p:spPr>
+        <p:txBody>
+          <a:bodyPr wrap="square" lIns="0" tIns="0" rIns="0" bIns="0" anchor="t">
+            <a:spAutoFit/>
+          </a:bodyPr>
+          <a:lstStyle/>
+          <a:p>
+            <a:pPr algn="r">
+              <a:lnSpc>
+                <a:spcPct val="100000"/>
+              </a:lnSpc>
+              <a:spcAft>
+                <a:spcPts val="0"/>
+              </a:spcAft>
+            </a:pPr>
+            <a:r>
+              <a:rPr lang="en-US" sz="800" b="1">
+                <a:solidFill>
+                  <a:srgbClr val="677074"/>
+                </a:solidFill>
+                <a:latin typeface="Aptos"/>
+              </a:rPr>
+              <a:t>10</a:t>
+            </a:r>
+            <a:endParaRPr sz="800" b="1">
+              <a:solidFill>
+                <a:srgbClr val="677074"/>
+              </a:solidFill>
+              <a:latin typeface="Aptos"/>
+            </a:endParaRPr>
+          </a:p>
+        </p:txBody>
+      </p:sp>
+    </p:spTree>
+  </p:cSld>
+  <p:clrMapOvr>
+    <a:masterClrMapping/>
+  </p:clrMapOvr>
+</p:sld>
+</file>
+
+<file path=ppt/slides/slide11.xml><?xml version="1.0" encoding="utf-8"?>
+<p:sld xmlns:a="http://schemas.openxmlformats.org/drawingml/2006/main" xmlns:r="http://schemas.openxmlformats.org/officeDocument/2006/relationships" xmlns:p="http://schemas.openxmlformats.org/presentationml/2006/main">
   <p:cSld>
     <p:bg>
       <p:bgPr>
@@ -3896,7 +4673,14 @@
         <p:cNvGrpSpPr/>
         <p:nvPr/>
       </p:nvGrpSpPr>
-      <p:grpSpPr/>
+      <p:grpSpPr>
+        <a:xfrm>
+          <a:off x="0" y="0"/>
+          <a:ext cx="0" cy="0"/>
+          <a:chOff x="0" y="0"/>
+          <a:chExt cx="0" cy="0"/>
+        </a:xfrm>
+      </p:grpSpPr>
       <p:sp>
         <p:nvSpPr>
           <p:cNvPr id="2" name="TextBox 1"/>
@@ -3914,7 +4698,7 @@
           <a:noFill/>
         </p:spPr>
         <p:txBody>
-          <a:bodyPr wrap="square" anchor="t" lIns="0" rIns="0" tIns="0" bIns="0">
+          <a:bodyPr wrap="square" lIns="0" tIns="0" rIns="0" bIns="0" anchor="t">
             <a:spAutoFit/>
           </a:bodyPr>
           <a:lstStyle/>
@@ -3956,7 +4740,7 @@
           <a:noFill/>
         </p:spPr>
         <p:txBody>
-          <a:bodyPr wrap="square" anchor="t" lIns="0" rIns="0" tIns="0" bIns="0">
+          <a:bodyPr wrap="square" lIns="0" tIns="0" rIns="0" bIns="0" anchor="t">
             <a:spAutoFit/>
           </a:bodyPr>
           <a:lstStyle/>
@@ -3998,7 +4782,7 @@
           <a:noFill/>
         </p:spPr>
         <p:txBody>
-          <a:bodyPr wrap="square" anchor="t" lIns="0" rIns="0" tIns="0" bIns="0">
+          <a:bodyPr wrap="square" lIns="0" tIns="0" rIns="0" bIns="0" anchor="t">
             <a:spAutoFit/>
           </a:bodyPr>
           <a:lstStyle/>
@@ -4065,6 +4849,7 @@
           <a:lstStyle/>
           <a:p>
             <a:pPr algn="ctr"/>
+            <a:endParaRPr/>
           </a:p>
         </p:txBody>
       </p:sp>
@@ -4108,6 +4893,7 @@
           <a:lstStyle/>
           <a:p>
             <a:pPr algn="ctr"/>
+            <a:endParaRPr/>
           </a:p>
         </p:txBody>
       </p:sp>
@@ -4128,7 +4914,7 @@
           <a:noFill/>
         </p:spPr>
         <p:txBody>
-          <a:bodyPr wrap="square" anchor="t" lIns="0" rIns="0" tIns="0" bIns="0">
+          <a:bodyPr wrap="square" lIns="0" tIns="0" rIns="0" bIns="0" anchor="t">
             <a:spAutoFit/>
           </a:bodyPr>
           <a:lstStyle/>
@@ -4195,6 +4981,7 @@
           <a:lstStyle/>
           <a:p>
             <a:pPr algn="ctr"/>
+            <a:endParaRPr/>
           </a:p>
         </p:txBody>
       </p:sp>
@@ -4215,7 +5002,7 @@
           <a:noFill/>
         </p:spPr>
         <p:txBody>
-          <a:bodyPr wrap="square" anchor="t" lIns="0" rIns="0" tIns="0" bIns="0">
+          <a:bodyPr wrap="square" lIns="0" tIns="0" rIns="0" bIns="0" anchor="t">
             <a:spAutoFit/>
           </a:bodyPr>
           <a:lstStyle/>
@@ -4282,6 +5069,7 @@
           <a:lstStyle/>
           <a:p>
             <a:pPr algn="ctr"/>
+            <a:endParaRPr/>
           </a:p>
         </p:txBody>
       </p:sp>
@@ -4302,7 +5090,7 @@
           <a:noFill/>
         </p:spPr>
         <p:txBody>
-          <a:bodyPr wrap="square" anchor="t" lIns="0" rIns="0" tIns="0" bIns="0">
+          <a:bodyPr wrap="square" lIns="0" tIns="0" rIns="0" bIns="0" anchor="t">
             <a:spAutoFit/>
           </a:bodyPr>
           <a:lstStyle/>
@@ -4369,6 +5157,7 @@
           <a:lstStyle/>
           <a:p>
             <a:pPr algn="ctr"/>
+            <a:endParaRPr/>
           </a:p>
         </p:txBody>
       </p:sp>
@@ -4389,7 +5178,7 @@
           <a:noFill/>
         </p:spPr>
         <p:txBody>
-          <a:bodyPr wrap="square" anchor="t" lIns="0" rIns="0" tIns="0" bIns="0">
+          <a:bodyPr wrap="square" lIns="0" tIns="0" rIns="0" bIns="0" anchor="t">
             <a:spAutoFit/>
           </a:bodyPr>
           <a:lstStyle/>
@@ -4456,6 +5245,7 @@
           <a:lstStyle/>
           <a:p>
             <a:pPr algn="ctr"/>
+            <a:endParaRPr/>
           </a:p>
         </p:txBody>
       </p:sp>
@@ -4476,7 +5266,7 @@
           <a:noFill/>
         </p:spPr>
         <p:txBody>
-          <a:bodyPr wrap="square" anchor="t" lIns="0" rIns="0" tIns="0" bIns="0">
+          <a:bodyPr wrap="square" lIns="0" tIns="0" rIns="0" bIns="0" anchor="t">
             <a:spAutoFit/>
           </a:bodyPr>
           <a:lstStyle/>
@@ -4543,6 +5333,7 @@
           <a:lstStyle/>
           <a:p>
             <a:pPr algn="ctr"/>
+            <a:endParaRPr/>
           </a:p>
         </p:txBody>
       </p:sp>
@@ -4586,6 +5377,7 @@
           <a:lstStyle/>
           <a:p>
             <a:pPr algn="ctr"/>
+            <a:endParaRPr/>
           </a:p>
         </p:txBody>
       </p:sp>
@@ -4606,7 +5398,7 @@
           <a:noFill/>
         </p:spPr>
         <p:txBody>
-          <a:bodyPr wrap="square" anchor="t" lIns="0" rIns="0" tIns="0" bIns="0">
+          <a:bodyPr wrap="square" lIns="0" tIns="0" rIns="0" bIns="0" anchor="t">
             <a:spAutoFit/>
           </a:bodyPr>
           <a:lstStyle/>
@@ -4673,6 +5465,7 @@
           <a:lstStyle/>
           <a:p>
             <a:pPr algn="ctr"/>
+            <a:endParaRPr/>
           </a:p>
         </p:txBody>
       </p:sp>
@@ -4693,7 +5486,7 @@
           <a:noFill/>
         </p:spPr>
         <p:txBody>
-          <a:bodyPr wrap="square" anchor="t" lIns="0" rIns="0" tIns="0" bIns="0">
+          <a:bodyPr wrap="square" lIns="0" tIns="0" rIns="0" bIns="0" anchor="t">
             <a:spAutoFit/>
           </a:bodyPr>
           <a:lstStyle/>
@@ -4760,6 +5553,7 @@
           <a:lstStyle/>
           <a:p>
             <a:pPr algn="ctr"/>
+            <a:endParaRPr/>
           </a:p>
         </p:txBody>
       </p:sp>
@@ -4780,7 +5574,7 @@
           <a:noFill/>
         </p:spPr>
         <p:txBody>
-          <a:bodyPr wrap="square" anchor="t" lIns="0" rIns="0" tIns="0" bIns="0">
+          <a:bodyPr wrap="square" lIns="0" tIns="0" rIns="0" bIns="0" anchor="t">
             <a:spAutoFit/>
           </a:bodyPr>
           <a:lstStyle/>
@@ -4847,6 +5641,7 @@
           <a:lstStyle/>
           <a:p>
             <a:pPr algn="ctr"/>
+            <a:endParaRPr/>
           </a:p>
         </p:txBody>
       </p:sp>
@@ -4867,7 +5662,7 @@
           <a:noFill/>
         </p:spPr>
         <p:txBody>
-          <a:bodyPr wrap="square" anchor="t" lIns="0" rIns="0" tIns="0" bIns="0">
+          <a:bodyPr wrap="square" lIns="0" tIns="0" rIns="0" bIns="0" anchor="t">
             <a:spAutoFit/>
           </a:bodyPr>
           <a:lstStyle/>
@@ -4934,6 +5729,7 @@
           <a:lstStyle/>
           <a:p>
             <a:pPr algn="ctr"/>
+            <a:endParaRPr/>
           </a:p>
         </p:txBody>
       </p:sp>
@@ -4954,7 +5750,7 @@
           <a:noFill/>
         </p:spPr>
         <p:txBody>
-          <a:bodyPr wrap="square" anchor="t" lIns="0" rIns="0" tIns="0" bIns="0">
+          <a:bodyPr wrap="square" lIns="0" tIns="0" rIns="0" bIns="0" anchor="t">
             <a:spAutoFit/>
           </a:bodyPr>
           <a:lstStyle/>
@@ -5021,6 +5817,7 @@
           <a:lstStyle/>
           <a:p>
             <a:pPr algn="ctr"/>
+            <a:endParaRPr/>
           </a:p>
         </p:txBody>
       </p:sp>
@@ -5064,6 +5861,7 @@
           <a:lstStyle/>
           <a:p>
             <a:pPr algn="ctr"/>
+            <a:endParaRPr/>
           </a:p>
         </p:txBody>
       </p:sp>
@@ -5084,7 +5882,7 @@
           <a:noFill/>
         </p:spPr>
         <p:txBody>
-          <a:bodyPr wrap="square" anchor="t" lIns="0" rIns="0" tIns="0" bIns="0">
+          <a:bodyPr wrap="square" lIns="0" tIns="0" rIns="0" bIns="0" anchor="t">
             <a:spAutoFit/>
           </a:bodyPr>
           <a:lstStyle/>
@@ -5151,6 +5949,7 @@
           <a:lstStyle/>
           <a:p>
             <a:pPr algn="ctr"/>
+            <a:endParaRPr/>
           </a:p>
         </p:txBody>
       </p:sp>
@@ -5171,7 +5970,7 @@
           <a:noFill/>
         </p:spPr>
         <p:txBody>
-          <a:bodyPr wrap="square" anchor="t" lIns="0" rIns="0" tIns="0" bIns="0">
+          <a:bodyPr wrap="square" lIns="0" tIns="0" rIns="0" bIns="0" anchor="t">
             <a:spAutoFit/>
           </a:bodyPr>
           <a:lstStyle/>
@@ -5238,6 +6037,7 @@
           <a:lstStyle/>
           <a:p>
             <a:pPr algn="ctr"/>
+            <a:endParaRPr/>
           </a:p>
         </p:txBody>
       </p:sp>
@@ -5258,7 +6058,7 @@
           <a:noFill/>
         </p:spPr>
         <p:txBody>
-          <a:bodyPr wrap="square" anchor="t" lIns="0" rIns="0" tIns="0" bIns="0">
+          <a:bodyPr wrap="square" lIns="0" tIns="0" rIns="0" bIns="0" anchor="t">
             <a:spAutoFit/>
           </a:bodyPr>
           <a:lstStyle/>
@@ -5325,6 +6125,7 @@
           <a:lstStyle/>
           <a:p>
             <a:pPr algn="ctr"/>
+            <a:endParaRPr/>
           </a:p>
         </p:txBody>
       </p:sp>
@@ -5345,7 +6146,7 @@
           <a:noFill/>
         </p:spPr>
         <p:txBody>
-          <a:bodyPr wrap="square" anchor="t" lIns="0" rIns="0" tIns="0" bIns="0">
+          <a:bodyPr wrap="square" lIns="0" tIns="0" rIns="0" bIns="0" anchor="t">
             <a:spAutoFit/>
           </a:bodyPr>
           <a:lstStyle/>
@@ -5412,6 +6213,7 @@
           <a:lstStyle/>
           <a:p>
             <a:pPr algn="ctr"/>
+            <a:endParaRPr/>
           </a:p>
         </p:txBody>
       </p:sp>
@@ -5432,7 +6234,7 @@
           <a:noFill/>
         </p:spPr>
         <p:txBody>
-          <a:bodyPr wrap="square" anchor="t" lIns="0" rIns="0" tIns="0" bIns="0">
+          <a:bodyPr wrap="square" lIns="0" tIns="0" rIns="0" bIns="0" anchor="t">
             <a:spAutoFit/>
           </a:bodyPr>
           <a:lstStyle/>
@@ -5474,7 +6276,7 @@
           <a:noFill/>
         </p:spPr>
         <p:txBody>
-          <a:bodyPr wrap="square" anchor="t" lIns="0" rIns="0" tIns="0" bIns="0">
+          <a:bodyPr wrap="square" lIns="0" tIns="0" rIns="0" bIns="0" anchor="t">
             <a:spAutoFit/>
           </a:bodyPr>
           <a:lstStyle/>
@@ -5516,7 +6318,7 @@
           <a:noFill/>
         </p:spPr>
         <p:txBody>
-          <a:bodyPr wrap="square" anchor="t" lIns="0" rIns="0" tIns="0" bIns="0">
+          <a:bodyPr wrap="square" lIns="0" tIns="0" rIns="0" bIns="0" anchor="t">
             <a:spAutoFit/>
           </a:bodyPr>
           <a:lstStyle/>
@@ -5550,15 +6352,15 @@
         <p:spPr>
           <a:xfrm>
             <a:off x="11082528" y="6537960"/>
-            <a:ext cx="411480" cy="164592"/>
-          </a:xfrm>
-          <a:prstGeom prst="rect">
-            <a:avLst/>
-          </a:prstGeom>
-          <a:noFill/>
-        </p:spPr>
-        <p:txBody>
-          <a:bodyPr wrap="square" anchor="t" lIns="0" rIns="0" tIns="0" bIns="0">
+            <a:ext cx="411480" cy="123111"/>
+          </a:xfrm>
+          <a:prstGeom prst="rect">
+            <a:avLst/>
+          </a:prstGeom>
+          <a:noFill/>
+        </p:spPr>
+        <p:txBody>
+          <a:bodyPr wrap="square" lIns="0" tIns="0" rIns="0" bIns="0" anchor="t">
             <a:spAutoFit/>
           </a:bodyPr>
           <a:lstStyle/>
@@ -5572,14 +6374,20 @@
               </a:spcAft>
             </a:pPr>
             <a:r>
-              <a:rPr sz="800" b="1">
+              <a:rPr lang="en-US" sz="800" b="1">
                 <a:solidFill>
                   <a:srgbClr val="98A1A0"/>
                 </a:solidFill>
                 <a:latin typeface="Aptos"/>
               </a:rPr>
-              <a:t>10</a:t>
-            </a:r>
+              <a:t>11</a:t>
+            </a:r>
+            <a:endParaRPr sz="800" b="1">
+              <a:solidFill>
+                <a:srgbClr val="98A1A0"/>
+              </a:solidFill>
+              <a:latin typeface="Aptos"/>
+            </a:endParaRPr>
           </a:p>
         </p:txBody>
       </p:sp>
@@ -5592,7 +6400,7 @@
 </file>
 
 <file path=ppt/slides/slide2.xml><?xml version="1.0" encoding="utf-8"?>
-<p:sld xmlns:a="http://schemas.openxmlformats.org/drawingml/2006/main" xmlns:p="http://schemas.openxmlformats.org/presentationml/2006/main" xmlns:r="http://schemas.openxmlformats.org/officeDocument/2006/relationships">
+<p:sld xmlns:a="http://schemas.openxmlformats.org/drawingml/2006/main" xmlns:r="http://schemas.openxmlformats.org/officeDocument/2006/relationships" xmlns:p="http://schemas.openxmlformats.org/presentationml/2006/main">
   <p:cSld>
     <p:bg>
       <p:bgPr>
@@ -5608,7 +6416,14 @@
         <p:cNvGrpSpPr/>
         <p:nvPr/>
       </p:nvGrpSpPr>
-      <p:grpSpPr/>
+      <p:grpSpPr>
+        <a:xfrm>
+          <a:off x="0" y="0"/>
+          <a:ext cx="0" cy="0"/>
+          <a:chOff x="0" y="0"/>
+          <a:chExt cx="0" cy="0"/>
+        </a:xfrm>
+      </p:grpSpPr>
       <p:sp>
         <p:nvSpPr>
           <p:cNvPr id="2" name="TextBox 1"/>
@@ -5626,7 +6441,7 @@
           <a:noFill/>
         </p:spPr>
         <p:txBody>
-          <a:bodyPr wrap="square" anchor="t" lIns="0" rIns="0" tIns="0" bIns="0">
+          <a:bodyPr wrap="square" lIns="0" tIns="0" rIns="0" bIns="0" anchor="t">
             <a:spAutoFit/>
           </a:bodyPr>
           <a:lstStyle/>
@@ -5668,7 +6483,7 @@
           <a:noFill/>
         </p:spPr>
         <p:txBody>
-          <a:bodyPr wrap="square" anchor="t" lIns="0" rIns="0" tIns="0" bIns="0">
+          <a:bodyPr wrap="square" lIns="0" tIns="0" rIns="0" bIns="0" anchor="t">
             <a:spAutoFit/>
           </a:bodyPr>
           <a:lstStyle/>
@@ -5710,7 +6525,7 @@
           <a:noFill/>
         </p:spPr>
         <p:txBody>
-          <a:bodyPr wrap="square" anchor="t" lIns="0" rIns="0" tIns="0" bIns="0">
+          <a:bodyPr wrap="square" lIns="0" tIns="0" rIns="0" bIns="0" anchor="t">
             <a:spAutoFit/>
           </a:bodyPr>
           <a:lstStyle/>
@@ -5777,6 +6592,7 @@
           <a:lstStyle/>
           <a:p>
             <a:pPr algn="ctr"/>
+            <a:endParaRPr/>
           </a:p>
         </p:txBody>
       </p:sp>
@@ -5797,7 +6613,7 @@
           <a:noFill/>
         </p:spPr>
         <p:txBody>
-          <a:bodyPr wrap="square" anchor="t" lIns="0" rIns="0" tIns="0" bIns="0">
+          <a:bodyPr wrap="square" lIns="0" tIns="0" rIns="0" bIns="0" anchor="t">
             <a:spAutoFit/>
           </a:bodyPr>
           <a:lstStyle/>
@@ -5864,6 +6680,7 @@
           <a:lstStyle/>
           <a:p>
             <a:pPr algn="ctr"/>
+            <a:endParaRPr/>
           </a:p>
         </p:txBody>
       </p:sp>
@@ -5884,7 +6701,7 @@
           <a:noFill/>
         </p:spPr>
         <p:txBody>
-          <a:bodyPr wrap="square" anchor="t" lIns="0" rIns="0" tIns="0" bIns="0">
+          <a:bodyPr wrap="square" lIns="0" tIns="0" rIns="0" bIns="0" anchor="t">
             <a:spAutoFit/>
           </a:bodyPr>
           <a:lstStyle/>
@@ -5951,6 +6768,7 @@
           <a:lstStyle/>
           <a:p>
             <a:pPr algn="ctr"/>
+            <a:endParaRPr/>
           </a:p>
         </p:txBody>
       </p:sp>
@@ -5971,7 +6789,7 @@
           <a:noFill/>
         </p:spPr>
         <p:txBody>
-          <a:bodyPr wrap="square" anchor="t" lIns="0" rIns="0" tIns="0" bIns="0">
+          <a:bodyPr wrap="square" lIns="0" tIns="0" rIns="0" bIns="0" anchor="t">
             <a:spAutoFit/>
           </a:bodyPr>
           <a:lstStyle/>
@@ -6038,6 +6856,7 @@
           <a:lstStyle/>
           <a:p>
             <a:pPr algn="ctr"/>
+            <a:endParaRPr/>
           </a:p>
         </p:txBody>
       </p:sp>
@@ -6058,7 +6877,7 @@
           <a:noFill/>
         </p:spPr>
         <p:txBody>
-          <a:bodyPr wrap="square" anchor="t" lIns="0" rIns="0" tIns="0" bIns="0">
+          <a:bodyPr wrap="square" lIns="0" tIns="0" rIns="0" bIns="0" anchor="t">
             <a:spAutoFit/>
           </a:bodyPr>
           <a:lstStyle/>
@@ -6125,6 +6944,7 @@
           <a:lstStyle/>
           <a:p>
             <a:pPr algn="ctr"/>
+            <a:endParaRPr/>
           </a:p>
         </p:txBody>
       </p:sp>
@@ -6145,7 +6965,7 @@
           <a:noFill/>
         </p:spPr>
         <p:txBody>
-          <a:bodyPr wrap="square" anchor="t" lIns="0" rIns="0" tIns="0" bIns="0">
+          <a:bodyPr wrap="square" lIns="0" tIns="0" rIns="0" bIns="0" anchor="t">
             <a:spAutoFit/>
           </a:bodyPr>
           <a:lstStyle/>
@@ -6210,6 +7030,7 @@
           <a:lstStyle/>
           <a:p>
             <a:pPr algn="ctr"/>
+            <a:endParaRPr/>
           </a:p>
         </p:txBody>
       </p:sp>
@@ -6255,6 +7076,7 @@
           <a:lstStyle/>
           <a:p>
             <a:pPr algn="ctr"/>
+            <a:endParaRPr/>
           </a:p>
         </p:txBody>
       </p:sp>
@@ -6275,7 +7097,7 @@
           <a:noFill/>
         </p:spPr>
         <p:txBody>
-          <a:bodyPr wrap="square" anchor="t" lIns="0" rIns="0" tIns="0" bIns="0">
+          <a:bodyPr wrap="square" lIns="0" tIns="0" rIns="0" bIns="0" anchor="t">
             <a:spAutoFit/>
           </a:bodyPr>
           <a:lstStyle/>
@@ -6317,7 +7139,7 @@
           <a:noFill/>
         </p:spPr>
         <p:txBody>
-          <a:bodyPr wrap="square" anchor="t" lIns="0" rIns="0" tIns="0" bIns="0">
+          <a:bodyPr wrap="square" lIns="0" tIns="0" rIns="0" bIns="0" anchor="t">
             <a:spAutoFit/>
           </a:bodyPr>
           <a:lstStyle/>
@@ -6359,7 +7181,7 @@
           <a:noFill/>
         </p:spPr>
         <p:txBody>
-          <a:bodyPr wrap="square" anchor="t" lIns="0" rIns="0" tIns="0" bIns="0">
+          <a:bodyPr wrap="square" lIns="0" tIns="0" rIns="0" bIns="0" anchor="t">
             <a:spAutoFit/>
           </a:bodyPr>
           <a:lstStyle/>
@@ -6401,7 +7223,7 @@
           <a:noFill/>
         </p:spPr>
         <p:txBody>
-          <a:bodyPr wrap="square" anchor="t" lIns="0" rIns="0" tIns="0" bIns="0">
+          <a:bodyPr wrap="square" lIns="0" tIns="0" rIns="0" bIns="0" anchor="t">
             <a:spAutoFit/>
           </a:bodyPr>
           <a:lstStyle/>
@@ -6443,7 +7265,7 @@
           <a:noFill/>
         </p:spPr>
         <p:txBody>
-          <a:bodyPr wrap="square" anchor="t" lIns="0" rIns="0" tIns="0" bIns="0">
+          <a:bodyPr wrap="square" lIns="0" tIns="0" rIns="0" bIns="0" anchor="t">
             <a:spAutoFit/>
           </a:bodyPr>
           <a:lstStyle/>
@@ -6485,7 +7307,7 @@
           <a:noFill/>
         </p:spPr>
         <p:txBody>
-          <a:bodyPr wrap="square" anchor="t" lIns="0" rIns="0" tIns="0" bIns="0">
+          <a:bodyPr wrap="square" lIns="0" tIns="0" rIns="0" bIns="0" anchor="t">
             <a:spAutoFit/>
           </a:bodyPr>
           <a:lstStyle/>
@@ -6527,7 +7349,7 @@
           <a:noFill/>
         </p:spPr>
         <p:txBody>
-          <a:bodyPr wrap="square" anchor="t" lIns="0" rIns="0" tIns="0" bIns="0">
+          <a:bodyPr wrap="square" lIns="0" tIns="0" rIns="0" bIns="0" anchor="t">
             <a:spAutoFit/>
           </a:bodyPr>
           <a:lstStyle/>
@@ -6569,7 +7391,7 @@
           <a:noFill/>
         </p:spPr>
         <p:txBody>
-          <a:bodyPr wrap="square" anchor="t" lIns="0" rIns="0" tIns="0" bIns="0">
+          <a:bodyPr wrap="square" lIns="0" tIns="0" rIns="0" bIns="0" anchor="t">
             <a:spAutoFit/>
           </a:bodyPr>
           <a:lstStyle/>
@@ -6611,7 +7433,7 @@
           <a:noFill/>
         </p:spPr>
         <p:txBody>
-          <a:bodyPr wrap="square" anchor="t" lIns="0" rIns="0" tIns="0" bIns="0">
+          <a:bodyPr wrap="square" lIns="0" tIns="0" rIns="0" bIns="0" anchor="t">
             <a:spAutoFit/>
           </a:bodyPr>
           <a:lstStyle/>
@@ -6653,7 +7475,7 @@
           <a:noFill/>
         </p:spPr>
         <p:txBody>
-          <a:bodyPr wrap="square" anchor="t" lIns="0" rIns="0" tIns="0" bIns="0">
+          <a:bodyPr wrap="square" lIns="0" tIns="0" rIns="0" bIns="0" anchor="t">
             <a:spAutoFit/>
           </a:bodyPr>
           <a:lstStyle/>
@@ -6687,15 +7509,15 @@
         <p:spPr>
           <a:xfrm>
             <a:off x="11082528" y="6537960"/>
-            <a:ext cx="411480" cy="164592"/>
-          </a:xfrm>
-          <a:prstGeom prst="rect">
-            <a:avLst/>
-          </a:prstGeom>
-          <a:noFill/>
-        </p:spPr>
-        <p:txBody>
-          <a:bodyPr wrap="square" anchor="t" lIns="0" rIns="0" tIns="0" bIns="0">
+            <a:ext cx="411480" cy="123111"/>
+          </a:xfrm>
+          <a:prstGeom prst="rect">
+            <a:avLst/>
+          </a:prstGeom>
+          <a:noFill/>
+        </p:spPr>
+        <p:txBody>
+          <a:bodyPr wrap="square" lIns="0" tIns="0" rIns="0" bIns="0" anchor="t">
             <a:spAutoFit/>
           </a:bodyPr>
           <a:lstStyle/>
@@ -6709,7 +7531,7 @@
               </a:spcAft>
             </a:pPr>
             <a:r>
-              <a:rPr sz="800" b="1">
+              <a:rPr lang="en-US" sz="800" b="1">
                 <a:solidFill>
                   <a:srgbClr val="677074"/>
                 </a:solidFill>
@@ -6717,6 +7539,12 @@
               </a:rPr>
               <a:t>02</a:t>
             </a:r>
+            <a:endParaRPr sz="800" b="1">
+              <a:solidFill>
+                <a:srgbClr val="677074"/>
+              </a:solidFill>
+              <a:latin typeface="Aptos"/>
+            </a:endParaRPr>
           </a:p>
         </p:txBody>
       </p:sp>
@@ -6729,7 +7557,622 @@
 </file>
 
 <file path=ppt/slides/slide3.xml><?xml version="1.0" encoding="utf-8"?>
-<p:sld xmlns:a="http://schemas.openxmlformats.org/drawingml/2006/main" xmlns:p="http://schemas.openxmlformats.org/presentationml/2006/main" xmlns:r="http://schemas.openxmlformats.org/officeDocument/2006/relationships">
+<p:sld xmlns:a="http://schemas.openxmlformats.org/drawingml/2006/main" xmlns:r="http://schemas.openxmlformats.org/officeDocument/2006/relationships" xmlns:p="http://schemas.openxmlformats.org/presentationml/2006/main">
+  <p:cSld>
+    <p:bg>
+      <p:bgPr>
+        <a:solidFill>
+          <a:srgbClr val="F4F1E8"/>
+        </a:solidFill>
+        <a:effectLst/>
+      </p:bgPr>
+    </p:bg>
+    <p:spTree>
+      <p:nvGrpSpPr>
+        <p:cNvPr id="1" name=""/>
+        <p:cNvGrpSpPr/>
+        <p:nvPr/>
+      </p:nvGrpSpPr>
+      <p:grpSpPr>
+        <a:xfrm>
+          <a:off x="0" y="0"/>
+          <a:ext cx="0" cy="0"/>
+          <a:chOff x="0" y="0"/>
+          <a:chExt cx="0" cy="0"/>
+        </a:xfrm>
+      </p:grpSpPr>
+      <p:sp>
+        <p:nvSpPr>
+          <p:cNvPr id="2" name="TextBox 1"/>
+          <p:cNvSpPr txBox="1"/>
+          <p:nvPr/>
+        </p:nvSpPr>
+        <p:spPr>
+          <a:xfrm>
+            <a:off x="658368" y="347472"/>
+            <a:ext cx="6583680" cy="153888"/>
+          </a:xfrm>
+          <a:prstGeom prst="rect">
+            <a:avLst/>
+          </a:prstGeom>
+          <a:noFill/>
+        </p:spPr>
+        <p:txBody>
+          <a:bodyPr wrap="square" lIns="0" tIns="0" rIns="0" bIns="0" anchor="t">
+            <a:spAutoFit/>
+          </a:bodyPr>
+          <a:lstStyle/>
+          <a:p>
+            <a:pPr algn="l">
+              <a:lnSpc>
+                <a:spcPct val="100000"/>
+              </a:lnSpc>
+              <a:spcAft>
+                <a:spcPts val="0"/>
+              </a:spcAft>
+            </a:pPr>
+            <a:r>
+              <a:rPr lang="en-US" sz="1000" b="1">
+                <a:solidFill>
+                  <a:srgbClr val="00766C"/>
+                </a:solidFill>
+                <a:latin typeface="Aptos"/>
+              </a:rPr>
+              <a:t>PROJECT-CREATED VIDEO</a:t>
+            </a:r>
+            <a:endParaRPr sz="1000" b="1">
+              <a:solidFill>
+                <a:srgbClr val="00766C"/>
+              </a:solidFill>
+              <a:latin typeface="Aptos"/>
+            </a:endParaRPr>
+          </a:p>
+        </p:txBody>
+      </p:sp>
+      <p:sp>
+        <p:nvSpPr>
+          <p:cNvPr id="3" name="TextBox 2"/>
+          <p:cNvSpPr txBox="1"/>
+          <p:nvPr/>
+        </p:nvSpPr>
+        <p:spPr>
+          <a:xfrm>
+            <a:off x="658368" y="713232"/>
+            <a:ext cx="10789920" cy="477054"/>
+          </a:xfrm>
+          <a:prstGeom prst="rect">
+            <a:avLst/>
+          </a:prstGeom>
+          <a:noFill/>
+        </p:spPr>
+        <p:txBody>
+          <a:bodyPr wrap="square" lIns="0" tIns="0" rIns="0" bIns="0" anchor="t">
+            <a:spAutoFit/>
+          </a:bodyPr>
+          <a:lstStyle/>
+          <a:p>
+            <a:pPr algn="l">
+              <a:lnSpc>
+                <a:spcPct val="100000"/>
+              </a:lnSpc>
+              <a:spcAft>
+                <a:spcPts val="0"/>
+              </a:spcAft>
+            </a:pPr>
+            <a:r>
+              <a:rPr lang="en-US" sz="3100" b="1">
+                <a:solidFill>
+                  <a:srgbClr val="181D22"/>
+                </a:solidFill>
+                <a:latin typeface="Aptos Display"/>
+              </a:rPr>
+              <a:t>Watch the project explain itself.</a:t>
+            </a:r>
+            <a:endParaRPr sz="3100" b="1">
+              <a:solidFill>
+                <a:srgbClr val="181D22"/>
+              </a:solidFill>
+              <a:latin typeface="Aptos Display"/>
+            </a:endParaRPr>
+          </a:p>
+        </p:txBody>
+      </p:sp>
+      <p:sp>
+        <p:nvSpPr>
+          <p:cNvPr id="4" name="TextBox 3"/>
+          <p:cNvSpPr txBox="1"/>
+          <p:nvPr/>
+        </p:nvSpPr>
+        <p:spPr>
+          <a:xfrm>
+            <a:off x="658368" y="1335024"/>
+            <a:ext cx="10469880" cy="215444"/>
+          </a:xfrm>
+          <a:prstGeom prst="rect">
+            <a:avLst/>
+          </a:prstGeom>
+          <a:noFill/>
+        </p:spPr>
+        <p:txBody>
+          <a:bodyPr wrap="square" lIns="0" tIns="0" rIns="0" bIns="0" anchor="t">
+            <a:spAutoFit/>
+          </a:bodyPr>
+          <a:lstStyle/>
+          <a:p>
+            <a:pPr algn="l">
+              <a:lnSpc>
+                <a:spcPct val="100000"/>
+              </a:lnSpc>
+              <a:spcAft>
+                <a:spcPts val="0"/>
+              </a:spcAft>
+            </a:pPr>
+            <a:r>
+              <a:rPr lang="en-US" sz="1400" b="0">
+                <a:solidFill>
+                  <a:srgbClr val="677074"/>
+                </a:solidFill>
+                <a:latin typeface="Aptos"/>
+              </a:rPr>
+              <a:t>An evidence-grounded walkthrough generated by Project Orchestrator from its own repository.</a:t>
+            </a:r>
+            <a:endParaRPr sz="1400" b="0">
+              <a:solidFill>
+                <a:srgbClr val="677074"/>
+              </a:solidFill>
+              <a:latin typeface="Aptos"/>
+            </a:endParaRPr>
+          </a:p>
+        </p:txBody>
+      </p:sp>
+      <p:sp>
+        <p:nvSpPr>
+          <p:cNvPr id="16" name="Rounded Rectangle 15"/>
+          <p:cNvSpPr/>
+          <p:nvPr/>
+        </p:nvSpPr>
+        <p:spPr>
+          <a:xfrm>
+            <a:off x="660400" y="2133600"/>
+            <a:ext cx="10858500" cy="3708400"/>
+          </a:xfrm>
+          <a:prstGeom prst="roundRect">
+            <a:avLst>
+              <a:gd name="adj" fmla="val 6000"/>
+            </a:avLst>
+          </a:prstGeom>
+          <a:solidFill>
+            <a:srgbClr val="181D22"/>
+          </a:solidFill>
+          <a:ln>
+            <a:noFill/>
+          </a:ln>
+        </p:spPr>
+        <p:style>
+          <a:lnRef idx="1">
+            <a:schemeClr val="accent1"/>
+          </a:lnRef>
+          <a:fillRef idx="3">
+            <a:schemeClr val="accent1"/>
+          </a:fillRef>
+          <a:effectRef idx="2">
+            <a:schemeClr val="accent1"/>
+          </a:effectRef>
+          <a:fontRef idx="minor">
+            <a:schemeClr val="lt1"/>
+          </a:fontRef>
+        </p:style>
+        <p:txBody>
+          <a:bodyPr rtlCol="0" anchor="ctr"/>
+          <a:lstStyle/>
+          <a:p>
+            <a:pPr algn="ctr"/>
+            <a:endParaRPr/>
+          </a:p>
+        </p:txBody>
+      </p:sp>
+      <p:sp>
+        <p:nvSpPr>
+          <p:cNvPr id="26" name="TextBox 25"/>
+          <p:cNvSpPr txBox="1"/>
+          <p:nvPr/>
+        </p:nvSpPr>
+        <p:spPr>
+          <a:xfrm>
+            <a:off x="658368" y="6537960"/>
+            <a:ext cx="3657600" cy="164592"/>
+          </a:xfrm>
+          <a:prstGeom prst="rect">
+            <a:avLst/>
+          </a:prstGeom>
+          <a:noFill/>
+        </p:spPr>
+        <p:txBody>
+          <a:bodyPr wrap="square" lIns="0" tIns="0" rIns="0" bIns="0" anchor="t">
+            <a:spAutoFit/>
+          </a:bodyPr>
+          <a:lstStyle/>
+          <a:p>
+            <a:pPr algn="l">
+              <a:lnSpc>
+                <a:spcPct val="100000"/>
+              </a:lnSpc>
+              <a:spcAft>
+                <a:spcPts val="0"/>
+              </a:spcAft>
+            </a:pPr>
+            <a:r>
+              <a:rPr sz="800" b="1">
+                <a:solidFill>
+                  <a:srgbClr val="677074"/>
+                </a:solidFill>
+                <a:latin typeface="Aptos"/>
+              </a:rPr>
+              <a:t>PROJECT ORCHESTRATOR</a:t>
+            </a:r>
+          </a:p>
+        </p:txBody>
+      </p:sp>
+      <p:sp>
+        <p:nvSpPr>
+          <p:cNvPr id="27" name="TextBox 26"/>
+          <p:cNvSpPr txBox="1"/>
+          <p:nvPr/>
+        </p:nvSpPr>
+        <p:spPr>
+          <a:xfrm>
+            <a:off x="11082528" y="6537960"/>
+            <a:ext cx="411480" cy="123111"/>
+          </a:xfrm>
+          <a:prstGeom prst="rect">
+            <a:avLst/>
+          </a:prstGeom>
+          <a:noFill/>
+        </p:spPr>
+        <p:txBody>
+          <a:bodyPr wrap="square" lIns="0" tIns="0" rIns="0" bIns="0" anchor="t">
+            <a:spAutoFit/>
+          </a:bodyPr>
+          <a:lstStyle/>
+          <a:p>
+            <a:pPr algn="r">
+              <a:lnSpc>
+                <a:spcPct val="100000"/>
+              </a:lnSpc>
+              <a:spcAft>
+                <a:spcPts val="0"/>
+              </a:spcAft>
+            </a:pPr>
+            <a:r>
+              <a:rPr lang="en-US" sz="800" b="1">
+                <a:solidFill>
+                  <a:srgbClr val="677074"/>
+                </a:solidFill>
+                <a:latin typeface="Aptos"/>
+              </a:rPr>
+              <a:t>03</a:t>
+            </a:r>
+            <a:endParaRPr sz="800" b="1">
+              <a:solidFill>
+                <a:srgbClr val="677074"/>
+              </a:solidFill>
+              <a:latin typeface="Aptos"/>
+            </a:endParaRPr>
+          </a:p>
+        </p:txBody>
+      </p:sp>
+      <p:sp>
+        <p:nvSpPr>
+          <p:cNvPr id="28" name="Rectangle: Rounded Corners 27">
+            <a:extLst>
+              <a:ext uri="{FF2B5EF4-FFF2-40B4-BE49-F238E27FC236}">
+                <a16:creationId xmlns:a16="http://schemas.microsoft.com/office/drawing/2014/main" id="{A594DFD2-5477-7BF5-CE9F-1F7A71CC8103}"/>
+              </a:ext>
+            </a:extLst>
+          </p:cNvPr>
+          <p:cNvSpPr/>
+          <p:nvPr/>
+        </p:nvSpPr>
+        <p:spPr>
+          <a:xfrm>
+            <a:off x="1041400" y="2590800"/>
+            <a:ext cx="101600" cy="2260600"/>
+          </a:xfrm>
+          <a:prstGeom prst="roundRect">
+            <a:avLst/>
+          </a:prstGeom>
+          <a:gradFill flip="none" rotWithShape="1">
+            <a:gsLst>
+              <a:gs pos="0">
+                <a:srgbClr val="FF8138"/>
+              </a:gs>
+              <a:gs pos="100000">
+                <a:schemeClr val="accent1">
+                  <a:tint val="50000"/>
+                  <a:shade val="100000"/>
+                  <a:satMod val="350000"/>
+                </a:schemeClr>
+              </a:gs>
+            </a:gsLst>
+            <a:lin ang="16200000" scaled="0"/>
+            <a:tileRect/>
+          </a:gradFill>
+          <a:ln w="9525" cap="flat" cmpd="sng" algn="ctr">
+            <a:noFill/>
+            <a:prstDash val="solid"/>
+          </a:ln>
+          <a:effectLst>
+            <a:outerShdw blurRad="40000" dist="23000" dir="5400000" rotWithShape="0">
+              <a:srgbClr val="000000">
+                <a:alpha val="35000"/>
+              </a:srgbClr>
+            </a:outerShdw>
+          </a:effectLst>
+          <a:extLst>
+            <a:ext uri="{91240B29-F687-4F45-9708-019B960494DF}">
+              <a14:hiddenLine xmlns:a14="http://schemas.microsoft.com/office/drawing/2010/main" w="9525" cap="flat" cmpd="sng" algn="ctr">
+                <a:solidFill>
+                  <a:schemeClr val="accent1">
+                    <a:shade val="95000"/>
+                    <a:satMod val="105000"/>
+                  </a:schemeClr>
+                </a:solidFill>
+                <a:prstDash val="solid"/>
+              </a14:hiddenLine>
+            </a:ext>
+          </a:extLst>
+        </p:spPr>
+        <p:style>
+          <a:lnRef idx="1">
+            <a:schemeClr val="accent1"/>
+          </a:lnRef>
+          <a:fillRef idx="3">
+            <a:schemeClr val="accent1"/>
+          </a:fillRef>
+          <a:effectRef idx="2">
+            <a:schemeClr val="accent1"/>
+          </a:effectRef>
+          <a:fontRef idx="minor">
+            <a:schemeClr val="lt1"/>
+          </a:fontRef>
+        </p:style>
+        <p:txBody>
+          <a:bodyPr rtlCol="0" anchor="ctr"/>
+          <a:lstStyle/>
+          <a:p>
+            <a:pPr algn="ctr"/>
+            <a:endParaRPr lang="en-US"/>
+          </a:p>
+        </p:txBody>
+      </p:sp>
+      <p:sp>
+        <p:nvSpPr>
+          <p:cNvPr id="29" name="TextBox 28">
+            <a:extLst>
+              <a:ext uri="{FF2B5EF4-FFF2-40B4-BE49-F238E27FC236}">
+                <a16:creationId xmlns:a16="http://schemas.microsoft.com/office/drawing/2014/main" id="{A6860CFD-7470-4E6F-6FEF-BAF297C60F10}"/>
+              </a:ext>
+            </a:extLst>
+          </p:cNvPr>
+          <p:cNvSpPr txBox="1"/>
+          <p:nvPr/>
+        </p:nvSpPr>
+        <p:spPr>
+          <a:xfrm>
+            <a:off x="1447800" y="2590800"/>
+            <a:ext cx="8636000" cy="292388"/>
+          </a:xfrm>
+          <a:prstGeom prst="rect">
+            <a:avLst/>
+          </a:prstGeom>
+          <a:noFill/>
+        </p:spPr>
+        <p:txBody>
+          <a:bodyPr vert="horz" rtlCol="0">
+            <a:spAutoFit/>
+          </a:bodyPr>
+          <a:lstStyle/>
+          <a:p>
+            <a:r>
+              <a:rPr lang="en-US" sz="1300" b="1">
+                <a:solidFill>
+                  <a:srgbClr val="FF8138"/>
+                </a:solidFill>
+                <a:latin typeface="Aptos Display" panose="020B0004020202020204" pitchFamily="34" charset="0"/>
+              </a:rPr>
+              <a:t>BUILT FROM VERIFIED PROJECT EVIDENCE</a:t>
+            </a:r>
+          </a:p>
+        </p:txBody>
+      </p:sp>
+      <p:sp>
+        <p:nvSpPr>
+          <p:cNvPr id="30" name="TextBox 29">
+            <a:extLst>
+              <a:ext uri="{FF2B5EF4-FFF2-40B4-BE49-F238E27FC236}">
+                <a16:creationId xmlns:a16="http://schemas.microsoft.com/office/drawing/2014/main" id="{9B8B9C0E-C365-A758-8D3D-85C6B39C2AA4}"/>
+              </a:ext>
+            </a:extLst>
+          </p:cNvPr>
+          <p:cNvSpPr txBox="1"/>
+          <p:nvPr/>
+        </p:nvSpPr>
+        <p:spPr>
+          <a:xfrm>
+            <a:off x="1447800" y="3073400"/>
+            <a:ext cx="8763000" cy="477054"/>
+          </a:xfrm>
+          <a:prstGeom prst="rect">
+            <a:avLst/>
+          </a:prstGeom>
+          <a:noFill/>
+        </p:spPr>
+        <p:txBody>
+          <a:bodyPr vert="horz" rtlCol="0">
+            <a:spAutoFit/>
+          </a:bodyPr>
+          <a:lstStyle/>
+          <a:p>
+            <a:r>
+              <a:rPr lang="en-US" sz="2500" b="1">
+                <a:solidFill>
+                  <a:srgbClr val="FFFFFF"/>
+                </a:solidFill>
+                <a:latin typeface="Aptos Display" panose="020B0004020202020204" pitchFamily="34" charset="0"/>
+              </a:rPr>
+              <a:t>See the workflow, controls, and proof in motion.</a:t>
+            </a:r>
+          </a:p>
+        </p:txBody>
+      </p:sp>
+      <p:sp>
+        <p:nvSpPr>
+          <p:cNvPr id="31" name="TextBox 30">
+            <a:extLst>
+              <a:ext uri="{FF2B5EF4-FFF2-40B4-BE49-F238E27FC236}">
+                <a16:creationId xmlns:a16="http://schemas.microsoft.com/office/drawing/2014/main" id="{7D80C97B-1B41-BD94-DC60-726D4460A46C}"/>
+              </a:ext>
+            </a:extLst>
+          </p:cNvPr>
+          <p:cNvSpPr txBox="1"/>
+          <p:nvPr/>
+        </p:nvSpPr>
+        <p:spPr>
+          <a:xfrm>
+            <a:off x="1447800" y="3848100"/>
+            <a:ext cx="8255000" cy="292388"/>
+          </a:xfrm>
+          <a:prstGeom prst="rect">
+            <a:avLst/>
+          </a:prstGeom>
+          <a:noFill/>
+        </p:spPr>
+        <p:txBody>
+          <a:bodyPr vert="horz" rtlCol="0">
+            <a:spAutoFit/>
+          </a:bodyPr>
+          <a:lstStyle/>
+          <a:p>
+            <a:r>
+              <a:rPr lang="en-US" sz="1300">
+                <a:solidFill>
+                  <a:srgbClr val="D6DBE1"/>
+                </a:solidFill>
+                <a:latin typeface="Aptos" panose="020B0004020202020204" pitchFamily="34" charset="0"/>
+              </a:rPr>
+              <a:t>Self-contained HTML | Local playback | Generated by this project</a:t>
+            </a:r>
+          </a:p>
+        </p:txBody>
+      </p:sp>
+      <p:sp>
+        <p:nvSpPr>
+          <p:cNvPr id="32" name="Rectangle: Rounded Corners 31">
+            <a:hlinkClick r:id="rId2" action="ppaction://hlinkfile"/>
+            <a:extLst>
+              <a:ext uri="{FF2B5EF4-FFF2-40B4-BE49-F238E27FC236}">
+                <a16:creationId xmlns:a16="http://schemas.microsoft.com/office/drawing/2014/main" id="{319A9943-4E0C-0621-2025-C7383792C942}"/>
+              </a:ext>
+            </a:extLst>
+          </p:cNvPr>
+          <p:cNvSpPr/>
+          <p:nvPr/>
+        </p:nvSpPr>
+        <p:spPr>
+          <a:xfrm>
+            <a:off x="1447800" y="4635500"/>
+            <a:ext cx="5461000" cy="685800"/>
+          </a:xfrm>
+          <a:prstGeom prst="roundRect">
+            <a:avLst/>
+          </a:prstGeom>
+          <a:gradFill flip="none" rotWithShape="1">
+            <a:gsLst>
+              <a:gs pos="0">
+                <a:srgbClr val="FF8138"/>
+              </a:gs>
+              <a:gs pos="100000">
+                <a:schemeClr val="accent1">
+                  <a:tint val="50000"/>
+                  <a:shade val="100000"/>
+                  <a:satMod val="350000"/>
+                </a:schemeClr>
+              </a:gs>
+            </a:gsLst>
+            <a:lin ang="16200000" scaled="0"/>
+            <a:tileRect/>
+          </a:gradFill>
+          <a:ln w="9525" cap="flat" cmpd="sng" algn="ctr">
+            <a:noFill/>
+            <a:prstDash val="solid"/>
+          </a:ln>
+          <a:effectLst>
+            <a:outerShdw blurRad="40000" dist="23000" dir="5400000" rotWithShape="0">
+              <a:srgbClr val="000000">
+                <a:alpha val="35000"/>
+              </a:srgbClr>
+            </a:outerShdw>
+          </a:effectLst>
+          <a:extLst>
+            <a:ext uri="{91240B29-F687-4F45-9708-019B960494DF}">
+              <a14:hiddenLine xmlns:a14="http://schemas.microsoft.com/office/drawing/2010/main" w="9525" cap="flat" cmpd="sng" algn="ctr">
+                <a:solidFill>
+                  <a:schemeClr val="accent1">
+                    <a:shade val="95000"/>
+                    <a:satMod val="105000"/>
+                  </a:schemeClr>
+                </a:solidFill>
+                <a:prstDash val="solid"/>
+              </a14:hiddenLine>
+            </a:ext>
+          </a:extLst>
+        </p:spPr>
+        <p:style>
+          <a:lnRef idx="1">
+            <a:schemeClr val="accent1"/>
+          </a:lnRef>
+          <a:fillRef idx="3">
+            <a:schemeClr val="accent1"/>
+          </a:fillRef>
+          <a:effectRef idx="2">
+            <a:schemeClr val="accent1"/>
+          </a:effectRef>
+          <a:fontRef idx="minor">
+            <a:schemeClr val="lt1"/>
+          </a:fontRef>
+        </p:style>
+        <p:txBody>
+          <a:bodyPr rtlCol="0" anchor="ctr"/>
+          <a:lstStyle/>
+          <a:p>
+            <a:pPr algn="ctr"/>
+            <a:r>
+              <a:rPr lang="en-US" sz="1600" b="1">
+                <a:solidFill>
+                  <a:srgbClr val="FFFFFF"/>
+                </a:solidFill>
+                <a:latin typeface="Aptos Display" panose="020B0004020202020204" pitchFamily="34" charset="0"/>
+              </a:rPr>
+              <a:t>Watch: Built by Project Orchestrator</a:t>
+            </a:r>
+          </a:p>
+        </p:txBody>
+      </p:sp>
+    </p:spTree>
+    <p:extLst>
+      <p:ext uri="{BB962C8B-B14F-4D97-AF65-F5344CB8AC3E}">
+        <p14:creationId xmlns:p14="http://schemas.microsoft.com/office/powerpoint/2010/main" val="4147864047"/>
+      </p:ext>
+    </p:extLst>
+  </p:cSld>
+  <p:clrMapOvr>
+    <a:masterClrMapping/>
+  </p:clrMapOvr>
+</p:sld>
+</file>
+
+<file path=ppt/slides/slide4.xml><?xml version="1.0" encoding="utf-8"?>
+<p:sld xmlns:a="http://schemas.openxmlformats.org/drawingml/2006/main" xmlns:r="http://schemas.openxmlformats.org/officeDocument/2006/relationships" xmlns:p="http://schemas.openxmlformats.org/presentationml/2006/main">
   <p:cSld>
     <p:bg>
       <p:bgPr>
@@ -6745,7 +8188,14 @@
         <p:cNvGrpSpPr/>
         <p:nvPr/>
       </p:nvGrpSpPr>
-      <p:grpSpPr/>
+      <p:grpSpPr>
+        <a:xfrm>
+          <a:off x="0" y="0"/>
+          <a:ext cx="0" cy="0"/>
+          <a:chOff x="0" y="0"/>
+          <a:chExt cx="0" cy="0"/>
+        </a:xfrm>
+      </p:grpSpPr>
       <p:sp>
         <p:nvSpPr>
           <p:cNvPr id="2" name="TextBox 1"/>
@@ -6763,7 +8213,7 @@
           <a:noFill/>
         </p:spPr>
         <p:txBody>
-          <a:bodyPr wrap="square" anchor="t" lIns="0" rIns="0" tIns="0" bIns="0">
+          <a:bodyPr wrap="square" lIns="0" tIns="0" rIns="0" bIns="0" anchor="t">
             <a:spAutoFit/>
           </a:bodyPr>
           <a:lstStyle/>
@@ -6805,7 +8255,7 @@
           <a:noFill/>
         </p:spPr>
         <p:txBody>
-          <a:bodyPr wrap="square" anchor="t" lIns="0" rIns="0" tIns="0" bIns="0">
+          <a:bodyPr wrap="square" lIns="0" tIns="0" rIns="0" bIns="0" anchor="t">
             <a:spAutoFit/>
           </a:bodyPr>
           <a:lstStyle/>
@@ -6847,7 +8297,7 @@
           <a:noFill/>
         </p:spPr>
         <p:txBody>
-          <a:bodyPr wrap="square" anchor="t" lIns="0" rIns="0" tIns="0" bIns="0">
+          <a:bodyPr wrap="square" lIns="0" tIns="0" rIns="0" bIns="0" anchor="t">
             <a:spAutoFit/>
           </a:bodyPr>
           <a:lstStyle/>
@@ -6914,6 +8364,7 @@
           <a:lstStyle/>
           <a:p>
             <a:pPr algn="ctr"/>
+            <a:endParaRPr/>
           </a:p>
         </p:txBody>
       </p:sp>
@@ -6934,7 +8385,7 @@
           <a:noFill/>
         </p:spPr>
         <p:txBody>
-          <a:bodyPr wrap="square" anchor="t" lIns="0" rIns="0" tIns="0" bIns="0">
+          <a:bodyPr wrap="square" lIns="0" tIns="0" rIns="0" bIns="0" anchor="t">
             <a:spAutoFit/>
           </a:bodyPr>
           <a:lstStyle/>
@@ -6976,7 +8427,7 @@
           <a:noFill/>
         </p:spPr>
         <p:txBody>
-          <a:bodyPr wrap="square" anchor="t" lIns="0" rIns="0" tIns="0" bIns="0">
+          <a:bodyPr wrap="square" lIns="0" tIns="0" rIns="0" bIns="0" anchor="t">
             <a:spAutoFit/>
           </a:bodyPr>
           <a:lstStyle/>
@@ -7018,7 +8469,7 @@
           <a:noFill/>
         </p:spPr>
         <p:txBody>
-          <a:bodyPr wrap="square" anchor="t" lIns="0" rIns="0" tIns="0" bIns="0">
+          <a:bodyPr wrap="square" lIns="0" tIns="0" rIns="0" bIns="0" anchor="t">
             <a:spAutoFit/>
           </a:bodyPr>
           <a:lstStyle/>
@@ -7085,6 +8536,7 @@
           <a:lstStyle/>
           <a:p>
             <a:pPr algn="ctr"/>
+            <a:endParaRPr/>
           </a:p>
         </p:txBody>
       </p:sp>
@@ -7105,7 +8557,7 @@
           <a:noFill/>
         </p:spPr>
         <p:txBody>
-          <a:bodyPr wrap="square" anchor="t" lIns="0" rIns="0" tIns="0" bIns="0">
+          <a:bodyPr wrap="square" lIns="0" tIns="0" rIns="0" bIns="0" anchor="t">
             <a:spAutoFit/>
           </a:bodyPr>
           <a:lstStyle/>
@@ -7147,7 +8599,7 @@
           <a:noFill/>
         </p:spPr>
         <p:txBody>
-          <a:bodyPr wrap="square" anchor="t" lIns="0" rIns="0" tIns="0" bIns="0">
+          <a:bodyPr wrap="square" lIns="0" tIns="0" rIns="0" bIns="0" anchor="t">
             <a:spAutoFit/>
           </a:bodyPr>
           <a:lstStyle/>
@@ -7189,7 +8641,7 @@
           <a:noFill/>
         </p:spPr>
         <p:txBody>
-          <a:bodyPr wrap="square" anchor="t" lIns="0" rIns="0" tIns="0" bIns="0">
+          <a:bodyPr wrap="square" lIns="0" tIns="0" rIns="0" bIns="0" anchor="t">
             <a:spAutoFit/>
           </a:bodyPr>
           <a:lstStyle/>
@@ -7256,6 +8708,7 @@
           <a:lstStyle/>
           <a:p>
             <a:pPr algn="ctr"/>
+            <a:endParaRPr/>
           </a:p>
         </p:txBody>
       </p:sp>
@@ -7276,7 +8729,7 @@
           <a:noFill/>
         </p:spPr>
         <p:txBody>
-          <a:bodyPr wrap="square" anchor="t" lIns="0" rIns="0" tIns="0" bIns="0">
+          <a:bodyPr wrap="square" lIns="0" tIns="0" rIns="0" bIns="0" anchor="t">
             <a:spAutoFit/>
           </a:bodyPr>
           <a:lstStyle/>
@@ -7318,7 +8771,7 @@
           <a:noFill/>
         </p:spPr>
         <p:txBody>
-          <a:bodyPr wrap="square" anchor="t" lIns="0" rIns="0" tIns="0" bIns="0">
+          <a:bodyPr wrap="square" lIns="0" tIns="0" rIns="0" bIns="0" anchor="t">
             <a:spAutoFit/>
           </a:bodyPr>
           <a:lstStyle/>
@@ -7360,7 +8813,7 @@
           <a:noFill/>
         </p:spPr>
         <p:txBody>
-          <a:bodyPr wrap="square" anchor="t" lIns="0" rIns="0" tIns="0" bIns="0">
+          <a:bodyPr wrap="square" lIns="0" tIns="0" rIns="0" bIns="0" anchor="t">
             <a:spAutoFit/>
           </a:bodyPr>
           <a:lstStyle/>
@@ -7427,6 +8880,7 @@
           <a:lstStyle/>
           <a:p>
             <a:pPr algn="ctr"/>
+            <a:endParaRPr/>
           </a:p>
         </p:txBody>
       </p:sp>
@@ -7447,7 +8901,7 @@
           <a:noFill/>
         </p:spPr>
         <p:txBody>
-          <a:bodyPr wrap="square" anchor="t" lIns="0" rIns="0" tIns="0" bIns="0">
+          <a:bodyPr wrap="square" lIns="0" tIns="0" rIns="0" bIns="0" anchor="t">
             <a:spAutoFit/>
           </a:bodyPr>
           <a:lstStyle/>
@@ -7489,7 +8943,7 @@
           <a:noFill/>
         </p:spPr>
         <p:txBody>
-          <a:bodyPr wrap="square" anchor="t" lIns="0" rIns="0" tIns="0" bIns="0">
+          <a:bodyPr wrap="square" lIns="0" tIns="0" rIns="0" bIns="0" anchor="t">
             <a:spAutoFit/>
           </a:bodyPr>
           <a:lstStyle/>
@@ -7531,7 +8985,7 @@
           <a:noFill/>
         </p:spPr>
         <p:txBody>
-          <a:bodyPr wrap="square" anchor="t" lIns="0" rIns="0" tIns="0" bIns="0">
+          <a:bodyPr wrap="square" lIns="0" tIns="0" rIns="0" bIns="0" anchor="t">
             <a:spAutoFit/>
           </a:bodyPr>
           <a:lstStyle/>
@@ -7598,6 +9052,7 @@
           <a:lstStyle/>
           <a:p>
             <a:pPr algn="ctr"/>
+            <a:endParaRPr/>
           </a:p>
         </p:txBody>
       </p:sp>
@@ -7618,7 +9073,7 @@
           <a:noFill/>
         </p:spPr>
         <p:txBody>
-          <a:bodyPr wrap="square" anchor="t" lIns="0" rIns="0" tIns="0" bIns="0">
+          <a:bodyPr wrap="square" lIns="0" tIns="0" rIns="0" bIns="0" anchor="t">
             <a:spAutoFit/>
           </a:bodyPr>
           <a:lstStyle/>
@@ -7660,7 +9115,7 @@
           <a:noFill/>
         </p:spPr>
         <p:txBody>
-          <a:bodyPr wrap="square" anchor="t" lIns="0" rIns="0" tIns="0" bIns="0">
+          <a:bodyPr wrap="square" lIns="0" tIns="0" rIns="0" bIns="0" anchor="t">
             <a:spAutoFit/>
           </a:bodyPr>
           <a:lstStyle/>
@@ -7702,7 +9157,7 @@
           <a:noFill/>
         </p:spPr>
         <p:txBody>
-          <a:bodyPr wrap="square" anchor="t" lIns="0" rIns="0" tIns="0" bIns="0">
+          <a:bodyPr wrap="square" lIns="0" tIns="0" rIns="0" bIns="0" anchor="t">
             <a:spAutoFit/>
           </a:bodyPr>
           <a:lstStyle/>
@@ -7744,7 +9199,7 @@
           <a:noFill/>
         </p:spPr>
         <p:txBody>
-          <a:bodyPr wrap="square" anchor="t" lIns="0" rIns="0" tIns="0" bIns="0">
+          <a:bodyPr wrap="square" lIns="0" tIns="0" rIns="0" bIns="0" anchor="t">
             <a:spAutoFit/>
           </a:bodyPr>
           <a:lstStyle/>
@@ -7778,15 +9233,15 @@
         <p:spPr>
           <a:xfrm>
             <a:off x="11082528" y="6537960"/>
-            <a:ext cx="411480" cy="164592"/>
-          </a:xfrm>
-          <a:prstGeom prst="rect">
-            <a:avLst/>
-          </a:prstGeom>
-          <a:noFill/>
-        </p:spPr>
-        <p:txBody>
-          <a:bodyPr wrap="square" anchor="t" lIns="0" rIns="0" tIns="0" bIns="0">
+            <a:ext cx="411480" cy="123111"/>
+          </a:xfrm>
+          <a:prstGeom prst="rect">
+            <a:avLst/>
+          </a:prstGeom>
+          <a:noFill/>
+        </p:spPr>
+        <p:txBody>
+          <a:bodyPr wrap="square" lIns="0" tIns="0" rIns="0" bIns="0" anchor="t">
             <a:spAutoFit/>
           </a:bodyPr>
           <a:lstStyle/>
@@ -7800,14 +9255,20 @@
               </a:spcAft>
             </a:pPr>
             <a:r>
-              <a:rPr sz="800" b="1">
+              <a:rPr lang="en-US" sz="800" b="1">
                 <a:solidFill>
                   <a:srgbClr val="677074"/>
                 </a:solidFill>
                 <a:latin typeface="Aptos"/>
               </a:rPr>
-              <a:t>03</a:t>
-            </a:r>
+              <a:t>04</a:t>
+            </a:r>
+            <a:endParaRPr sz="800" b="1">
+              <a:solidFill>
+                <a:srgbClr val="677074"/>
+              </a:solidFill>
+              <a:latin typeface="Aptos"/>
+            </a:endParaRPr>
           </a:p>
         </p:txBody>
       </p:sp>
@@ -7819,8 +9280,8 @@
 </p:sld>
 </file>
 
-<file path=ppt/slides/slide4.xml><?xml version="1.0" encoding="utf-8"?>
-<p:sld xmlns:a="http://schemas.openxmlformats.org/drawingml/2006/main" xmlns:p="http://schemas.openxmlformats.org/presentationml/2006/main" xmlns:r="http://schemas.openxmlformats.org/officeDocument/2006/relationships">
+<file path=ppt/slides/slide5.xml><?xml version="1.0" encoding="utf-8"?>
+<p:sld xmlns:a="http://schemas.openxmlformats.org/drawingml/2006/main" xmlns:r="http://schemas.openxmlformats.org/officeDocument/2006/relationships" xmlns:p="http://schemas.openxmlformats.org/presentationml/2006/main">
   <p:cSld>
     <p:bg>
       <p:bgPr>
@@ -7836,7 +9297,14 @@
         <p:cNvGrpSpPr/>
         <p:nvPr/>
       </p:nvGrpSpPr>
-      <p:grpSpPr/>
+      <p:grpSpPr>
+        <a:xfrm>
+          <a:off x="0" y="0"/>
+          <a:ext cx="0" cy="0"/>
+          <a:chOff x="0" y="0"/>
+          <a:chExt cx="0" cy="0"/>
+        </a:xfrm>
+      </p:grpSpPr>
       <p:sp>
         <p:nvSpPr>
           <p:cNvPr id="2" name="TextBox 1"/>
@@ -7854,7 +9322,7 @@
           <a:noFill/>
         </p:spPr>
         <p:txBody>
-          <a:bodyPr wrap="square" anchor="t" lIns="0" rIns="0" tIns="0" bIns="0">
+          <a:bodyPr wrap="square" lIns="0" tIns="0" rIns="0" bIns="0" anchor="t">
             <a:spAutoFit/>
           </a:bodyPr>
           <a:lstStyle/>
@@ -7896,7 +9364,7 @@
           <a:noFill/>
         </p:spPr>
         <p:txBody>
-          <a:bodyPr wrap="square" anchor="t" lIns="0" rIns="0" tIns="0" bIns="0">
+          <a:bodyPr wrap="square" lIns="0" tIns="0" rIns="0" bIns="0" anchor="t">
             <a:spAutoFit/>
           </a:bodyPr>
           <a:lstStyle/>
@@ -7938,7 +9406,7 @@
           <a:noFill/>
         </p:spPr>
         <p:txBody>
-          <a:bodyPr wrap="square" anchor="t" lIns="0" rIns="0" tIns="0" bIns="0">
+          <a:bodyPr wrap="square" lIns="0" tIns="0" rIns="0" bIns="0" anchor="t">
             <a:spAutoFit/>
           </a:bodyPr>
           <a:lstStyle/>
@@ -8005,6 +9473,7 @@
           <a:lstStyle/>
           <a:p>
             <a:pPr algn="ctr"/>
+            <a:endParaRPr/>
           </a:p>
         </p:txBody>
       </p:sp>
@@ -8048,6 +9517,7 @@
           <a:lstStyle/>
           <a:p>
             <a:pPr algn="ctr"/>
+            <a:endParaRPr/>
           </a:p>
         </p:txBody>
       </p:sp>
@@ -8068,7 +9538,7 @@
           <a:noFill/>
         </p:spPr>
         <p:txBody>
-          <a:bodyPr wrap="square" anchor="t" lIns="0" rIns="0" tIns="0" bIns="0">
+          <a:bodyPr wrap="square" lIns="0" tIns="0" rIns="0" bIns="0" anchor="t">
             <a:spAutoFit/>
           </a:bodyPr>
           <a:lstStyle/>
@@ -8110,7 +9580,7 @@
           <a:noFill/>
         </p:spPr>
         <p:txBody>
-          <a:bodyPr wrap="square" anchor="t" lIns="0" rIns="0" tIns="0" bIns="0">
+          <a:bodyPr wrap="square" lIns="0" tIns="0" rIns="0" bIns="0" anchor="t">
             <a:spAutoFit/>
           </a:bodyPr>
           <a:lstStyle/>
@@ -8152,7 +9622,7 @@
           <a:noFill/>
         </p:spPr>
         <p:txBody>
-          <a:bodyPr wrap="square" anchor="t" lIns="0" rIns="0" tIns="0" bIns="0">
+          <a:bodyPr wrap="square" lIns="0" tIns="0" rIns="0" bIns="0" anchor="t">
             <a:spAutoFit/>
           </a:bodyPr>
           <a:lstStyle/>
@@ -8194,7 +9664,7 @@
           <a:noFill/>
         </p:spPr>
         <p:txBody>
-          <a:bodyPr wrap="square" anchor="t" lIns="0" rIns="0" tIns="0" bIns="0">
+          <a:bodyPr wrap="square" lIns="0" tIns="0" rIns="0" bIns="0" anchor="t">
             <a:spAutoFit/>
           </a:bodyPr>
           <a:lstStyle/>
@@ -8261,6 +9731,7 @@
           <a:lstStyle/>
           <a:p>
             <a:pPr algn="ctr"/>
+            <a:endParaRPr/>
           </a:p>
         </p:txBody>
       </p:sp>
@@ -8304,6 +9775,7 @@
           <a:lstStyle/>
           <a:p>
             <a:pPr algn="ctr"/>
+            <a:endParaRPr/>
           </a:p>
         </p:txBody>
       </p:sp>
@@ -8324,7 +9796,7 @@
           <a:noFill/>
         </p:spPr>
         <p:txBody>
-          <a:bodyPr wrap="square" anchor="t" lIns="0" rIns="0" tIns="0" bIns="0">
+          <a:bodyPr wrap="square" lIns="0" tIns="0" rIns="0" bIns="0" anchor="t">
             <a:spAutoFit/>
           </a:bodyPr>
           <a:lstStyle/>
@@ -8366,7 +9838,7 @@
           <a:noFill/>
         </p:spPr>
         <p:txBody>
-          <a:bodyPr wrap="square" anchor="t" lIns="0" rIns="0" tIns="0" bIns="0">
+          <a:bodyPr wrap="square" lIns="0" tIns="0" rIns="0" bIns="0" anchor="t">
             <a:spAutoFit/>
           </a:bodyPr>
           <a:lstStyle/>
@@ -8408,7 +9880,7 @@
           <a:noFill/>
         </p:spPr>
         <p:txBody>
-          <a:bodyPr wrap="square" anchor="t" lIns="0" rIns="0" tIns="0" bIns="0">
+          <a:bodyPr wrap="square" lIns="0" tIns="0" rIns="0" bIns="0" anchor="t">
             <a:spAutoFit/>
           </a:bodyPr>
           <a:lstStyle/>
@@ -8450,7 +9922,7 @@
           <a:noFill/>
         </p:spPr>
         <p:txBody>
-          <a:bodyPr wrap="square" anchor="t" lIns="0" rIns="0" tIns="0" bIns="0">
+          <a:bodyPr wrap="square" lIns="0" tIns="0" rIns="0" bIns="0" anchor="t">
             <a:spAutoFit/>
           </a:bodyPr>
           <a:lstStyle/>
@@ -8517,6 +9989,7 @@
           <a:lstStyle/>
           <a:p>
             <a:pPr algn="ctr"/>
+            <a:endParaRPr/>
           </a:p>
         </p:txBody>
       </p:sp>
@@ -8560,6 +10033,7 @@
           <a:lstStyle/>
           <a:p>
             <a:pPr algn="ctr"/>
+            <a:endParaRPr/>
           </a:p>
         </p:txBody>
       </p:sp>
@@ -8580,7 +10054,7 @@
           <a:noFill/>
         </p:spPr>
         <p:txBody>
-          <a:bodyPr wrap="square" anchor="t" lIns="0" rIns="0" tIns="0" bIns="0">
+          <a:bodyPr wrap="square" lIns="0" tIns="0" rIns="0" bIns="0" anchor="t">
             <a:spAutoFit/>
           </a:bodyPr>
           <a:lstStyle/>
@@ -8622,7 +10096,7 @@
           <a:noFill/>
         </p:spPr>
         <p:txBody>
-          <a:bodyPr wrap="square" anchor="t" lIns="0" rIns="0" tIns="0" bIns="0">
+          <a:bodyPr wrap="square" lIns="0" tIns="0" rIns="0" bIns="0" anchor="t">
             <a:spAutoFit/>
           </a:bodyPr>
           <a:lstStyle/>
@@ -8664,7 +10138,7 @@
           <a:noFill/>
         </p:spPr>
         <p:txBody>
-          <a:bodyPr wrap="square" anchor="t" lIns="0" rIns="0" tIns="0" bIns="0">
+          <a:bodyPr wrap="square" lIns="0" tIns="0" rIns="0" bIns="0" anchor="t">
             <a:spAutoFit/>
           </a:bodyPr>
           <a:lstStyle/>
@@ -8706,7 +10180,7 @@
           <a:noFill/>
         </p:spPr>
         <p:txBody>
-          <a:bodyPr wrap="square" anchor="t" lIns="0" rIns="0" tIns="0" bIns="0">
+          <a:bodyPr wrap="square" lIns="0" tIns="0" rIns="0" bIns="0" anchor="t">
             <a:spAutoFit/>
           </a:bodyPr>
           <a:lstStyle/>
@@ -8773,6 +10247,7 @@
           <a:lstStyle/>
           <a:p>
             <a:pPr algn="ctr"/>
+            <a:endParaRPr/>
           </a:p>
         </p:txBody>
       </p:sp>
@@ -8793,7 +10268,7 @@
           <a:noFill/>
         </p:spPr>
         <p:txBody>
-          <a:bodyPr wrap="square" anchor="t" lIns="0" rIns="0" tIns="0" bIns="0">
+          <a:bodyPr wrap="square" lIns="0" tIns="0" rIns="0" bIns="0" anchor="t">
             <a:spAutoFit/>
           </a:bodyPr>
           <a:lstStyle/>
@@ -8835,7 +10310,7 @@
           <a:noFill/>
         </p:spPr>
         <p:txBody>
-          <a:bodyPr wrap="square" anchor="t" lIns="0" rIns="0" tIns="0" bIns="0">
+          <a:bodyPr wrap="square" lIns="0" tIns="0" rIns="0" bIns="0" anchor="t">
             <a:spAutoFit/>
           </a:bodyPr>
           <a:lstStyle/>
@@ -8869,15 +10344,15 @@
         <p:spPr>
           <a:xfrm>
             <a:off x="11082528" y="6537960"/>
-            <a:ext cx="411480" cy="164592"/>
-          </a:xfrm>
-          <a:prstGeom prst="rect">
-            <a:avLst/>
-          </a:prstGeom>
-          <a:noFill/>
-        </p:spPr>
-        <p:txBody>
-          <a:bodyPr wrap="square" anchor="t" lIns="0" rIns="0" tIns="0" bIns="0">
+            <a:ext cx="411480" cy="123111"/>
+          </a:xfrm>
+          <a:prstGeom prst="rect">
+            <a:avLst/>
+          </a:prstGeom>
+          <a:noFill/>
+        </p:spPr>
+        <p:txBody>
+          <a:bodyPr wrap="square" lIns="0" tIns="0" rIns="0" bIns="0" anchor="t">
             <a:spAutoFit/>
           </a:bodyPr>
           <a:lstStyle/>
@@ -8891,14 +10366,20 @@
               </a:spcAft>
             </a:pPr>
             <a:r>
-              <a:rPr sz="800" b="1">
+              <a:rPr lang="en-US" sz="800" b="1">
                 <a:solidFill>
                   <a:srgbClr val="677074"/>
                 </a:solidFill>
                 <a:latin typeface="Aptos"/>
               </a:rPr>
-              <a:t>04</a:t>
-            </a:r>
+              <a:t>05</a:t>
+            </a:r>
+            <a:endParaRPr sz="800" b="1">
+              <a:solidFill>
+                <a:srgbClr val="677074"/>
+              </a:solidFill>
+              <a:latin typeface="Aptos"/>
+            </a:endParaRPr>
           </a:p>
         </p:txBody>
       </p:sp>
@@ -8910,8 +10391,8 @@
 </p:sld>
 </file>
 
-<file path=ppt/slides/slide5.xml><?xml version="1.0" encoding="utf-8"?>
-<p:sld xmlns:a="http://schemas.openxmlformats.org/drawingml/2006/main" xmlns:p="http://schemas.openxmlformats.org/presentationml/2006/main" xmlns:r="http://schemas.openxmlformats.org/officeDocument/2006/relationships">
+<file path=ppt/slides/slide6.xml><?xml version="1.0" encoding="utf-8"?>
+<p:sld xmlns:a="http://schemas.openxmlformats.org/drawingml/2006/main" xmlns:r="http://schemas.openxmlformats.org/officeDocument/2006/relationships" xmlns:p="http://schemas.openxmlformats.org/presentationml/2006/main">
   <p:cSld>
     <p:bg>
       <p:bgPr>
@@ -8927,7 +10408,14 @@
         <p:cNvGrpSpPr/>
         <p:nvPr/>
       </p:nvGrpSpPr>
-      <p:grpSpPr/>
+      <p:grpSpPr>
+        <a:xfrm>
+          <a:off x="0" y="0"/>
+          <a:ext cx="0" cy="0"/>
+          <a:chOff x="0" y="0"/>
+          <a:chExt cx="0" cy="0"/>
+        </a:xfrm>
+      </p:grpSpPr>
       <p:sp>
         <p:nvSpPr>
           <p:cNvPr id="2" name="TextBox 1"/>
@@ -8945,7 +10433,7 @@
           <a:noFill/>
         </p:spPr>
         <p:txBody>
-          <a:bodyPr wrap="square" anchor="t" lIns="0" rIns="0" tIns="0" bIns="0">
+          <a:bodyPr wrap="square" lIns="0" tIns="0" rIns="0" bIns="0" anchor="t">
             <a:spAutoFit/>
           </a:bodyPr>
           <a:lstStyle/>
@@ -8987,7 +10475,7 @@
           <a:noFill/>
         </p:spPr>
         <p:txBody>
-          <a:bodyPr wrap="square" anchor="t" lIns="0" rIns="0" tIns="0" bIns="0">
+          <a:bodyPr wrap="square" lIns="0" tIns="0" rIns="0" bIns="0" anchor="t">
             <a:spAutoFit/>
           </a:bodyPr>
           <a:lstStyle/>
@@ -9029,7 +10517,7 @@
           <a:noFill/>
         </p:spPr>
         <p:txBody>
-          <a:bodyPr wrap="square" anchor="t" lIns="0" rIns="0" tIns="0" bIns="0">
+          <a:bodyPr wrap="square" lIns="0" tIns="0" rIns="0" bIns="0" anchor="t">
             <a:spAutoFit/>
           </a:bodyPr>
           <a:lstStyle/>
@@ -9071,7 +10559,7 @@
           <a:noFill/>
         </p:spPr>
         <p:txBody>
-          <a:bodyPr wrap="square" anchor="t" lIns="0" rIns="0" tIns="0" bIns="0">
+          <a:bodyPr wrap="square" lIns="0" tIns="0" rIns="0" bIns="0" anchor="t">
             <a:spAutoFit/>
           </a:bodyPr>
           <a:lstStyle/>
@@ -9138,6 +10626,7 @@
           <a:lstStyle/>
           <a:p>
             <a:pPr algn="ctr"/>
+            <a:endParaRPr/>
           </a:p>
         </p:txBody>
       </p:sp>
@@ -9158,7 +10647,7 @@
           <a:noFill/>
         </p:spPr>
         <p:txBody>
-          <a:bodyPr wrap="square" anchor="t" lIns="0" rIns="0" tIns="0" bIns="0">
+          <a:bodyPr wrap="square" lIns="0" tIns="0" rIns="0" bIns="0" anchor="t">
             <a:spAutoFit/>
           </a:bodyPr>
           <a:lstStyle/>
@@ -9223,6 +10712,7 @@
           <a:lstStyle/>
           <a:p>
             <a:pPr algn="ctr"/>
+            <a:endParaRPr/>
           </a:p>
         </p:txBody>
       </p:sp>
@@ -9268,6 +10758,7 @@
           <a:lstStyle/>
           <a:p>
             <a:pPr algn="ctr"/>
+            <a:endParaRPr/>
           </a:p>
         </p:txBody>
       </p:sp>
@@ -9288,7 +10779,7 @@
           <a:noFill/>
         </p:spPr>
         <p:txBody>
-          <a:bodyPr wrap="square" anchor="t" lIns="0" rIns="0" tIns="0" bIns="0">
+          <a:bodyPr wrap="square" lIns="0" tIns="0" rIns="0" bIns="0" anchor="t">
             <a:spAutoFit/>
           </a:bodyPr>
           <a:lstStyle/>
@@ -9330,7 +10821,7 @@
           <a:noFill/>
         </p:spPr>
         <p:txBody>
-          <a:bodyPr wrap="square" anchor="t" lIns="0" rIns="0" tIns="0" bIns="0">
+          <a:bodyPr wrap="square" lIns="0" tIns="0" rIns="0" bIns="0" anchor="t">
             <a:spAutoFit/>
           </a:bodyPr>
           <a:lstStyle/>
@@ -9395,6 +10886,7 @@
           <a:lstStyle/>
           <a:p>
             <a:pPr algn="ctr"/>
+            <a:endParaRPr/>
           </a:p>
         </p:txBody>
       </p:sp>
@@ -9440,6 +10932,7 @@
           <a:lstStyle/>
           <a:p>
             <a:pPr algn="ctr"/>
+            <a:endParaRPr/>
           </a:p>
         </p:txBody>
       </p:sp>
@@ -9460,7 +10953,7 @@
           <a:noFill/>
         </p:spPr>
         <p:txBody>
-          <a:bodyPr wrap="square" anchor="t" lIns="0" rIns="0" tIns="0" bIns="0">
+          <a:bodyPr wrap="square" lIns="0" tIns="0" rIns="0" bIns="0" anchor="t">
             <a:spAutoFit/>
           </a:bodyPr>
           <a:lstStyle/>
@@ -9502,7 +10995,7 @@
           <a:noFill/>
         </p:spPr>
         <p:txBody>
-          <a:bodyPr wrap="square" anchor="t" lIns="0" rIns="0" tIns="0" bIns="0">
+          <a:bodyPr wrap="square" lIns="0" tIns="0" rIns="0" bIns="0" anchor="t">
             <a:spAutoFit/>
           </a:bodyPr>
           <a:lstStyle/>
@@ -9567,6 +11060,7 @@
           <a:lstStyle/>
           <a:p>
             <a:pPr algn="ctr"/>
+            <a:endParaRPr/>
           </a:p>
         </p:txBody>
       </p:sp>
@@ -9612,6 +11106,7 @@
           <a:lstStyle/>
           <a:p>
             <a:pPr algn="ctr"/>
+            <a:endParaRPr/>
           </a:p>
         </p:txBody>
       </p:sp>
@@ -9632,7 +11127,7 @@
           <a:noFill/>
         </p:spPr>
         <p:txBody>
-          <a:bodyPr wrap="square" anchor="t" lIns="0" rIns="0" tIns="0" bIns="0">
+          <a:bodyPr wrap="square" lIns="0" tIns="0" rIns="0" bIns="0" anchor="t">
             <a:spAutoFit/>
           </a:bodyPr>
           <a:lstStyle/>
@@ -9674,7 +11169,7 @@
           <a:noFill/>
         </p:spPr>
         <p:txBody>
-          <a:bodyPr wrap="square" anchor="t" lIns="0" rIns="0" tIns="0" bIns="0">
+          <a:bodyPr wrap="square" lIns="0" tIns="0" rIns="0" bIns="0" anchor="t">
             <a:spAutoFit/>
           </a:bodyPr>
           <a:lstStyle/>
@@ -9739,6 +11234,7 @@
           <a:lstStyle/>
           <a:p>
             <a:pPr algn="ctr"/>
+            <a:endParaRPr/>
           </a:p>
         </p:txBody>
       </p:sp>
@@ -9784,6 +11280,7 @@
           <a:lstStyle/>
           <a:p>
             <a:pPr algn="ctr"/>
+            <a:endParaRPr/>
           </a:p>
         </p:txBody>
       </p:sp>
@@ -9804,7 +11301,7 @@
           <a:noFill/>
         </p:spPr>
         <p:txBody>
-          <a:bodyPr wrap="square" anchor="t" lIns="0" rIns="0" tIns="0" bIns="0">
+          <a:bodyPr wrap="square" lIns="0" tIns="0" rIns="0" bIns="0" anchor="t">
             <a:spAutoFit/>
           </a:bodyPr>
           <a:lstStyle/>
@@ -9846,7 +11343,7 @@
           <a:noFill/>
         </p:spPr>
         <p:txBody>
-          <a:bodyPr wrap="square" anchor="t" lIns="0" rIns="0" tIns="0" bIns="0">
+          <a:bodyPr wrap="square" lIns="0" tIns="0" rIns="0" bIns="0" anchor="t">
             <a:spAutoFit/>
           </a:bodyPr>
           <a:lstStyle/>
@@ -9913,6 +11410,7 @@
           <a:lstStyle/>
           <a:p>
             <a:pPr algn="ctr"/>
+            <a:endParaRPr/>
           </a:p>
         </p:txBody>
       </p:sp>
@@ -9933,7 +11431,7 @@
           <a:noFill/>
         </p:spPr>
         <p:txBody>
-          <a:bodyPr wrap="square" anchor="t" lIns="0" rIns="0" tIns="0" bIns="0">
+          <a:bodyPr wrap="square" lIns="0" tIns="0" rIns="0" bIns="0" anchor="t">
             <a:spAutoFit/>
           </a:bodyPr>
           <a:lstStyle/>
@@ -9975,7 +11473,7 @@
           <a:noFill/>
         </p:spPr>
         <p:txBody>
-          <a:bodyPr wrap="square" anchor="t" lIns="0" rIns="0" tIns="0" bIns="0">
+          <a:bodyPr wrap="square" lIns="0" tIns="0" rIns="0" bIns="0" anchor="t">
             <a:spAutoFit/>
           </a:bodyPr>
           <a:lstStyle/>
@@ -10017,7 +11515,7 @@
           <a:noFill/>
         </p:spPr>
         <p:txBody>
-          <a:bodyPr wrap="square" anchor="t" lIns="0" rIns="0" tIns="0" bIns="0">
+          <a:bodyPr wrap="square" lIns="0" tIns="0" rIns="0" bIns="0" anchor="t">
             <a:spAutoFit/>
           </a:bodyPr>
           <a:lstStyle/>
@@ -10059,7 +11557,7 @@
           <a:noFill/>
         </p:spPr>
         <p:txBody>
-          <a:bodyPr wrap="square" anchor="t" lIns="0" rIns="0" tIns="0" bIns="0">
+          <a:bodyPr wrap="square" lIns="0" tIns="0" rIns="0" bIns="0" anchor="t">
             <a:spAutoFit/>
           </a:bodyPr>
           <a:lstStyle/>
@@ -10101,7 +11599,7 @@
           <a:noFill/>
         </p:spPr>
         <p:txBody>
-          <a:bodyPr wrap="square" anchor="t" lIns="0" rIns="0" tIns="0" bIns="0">
+          <a:bodyPr wrap="square" lIns="0" tIns="0" rIns="0" bIns="0" anchor="t">
             <a:spAutoFit/>
           </a:bodyPr>
           <a:lstStyle/>
@@ -10143,7 +11641,7 @@
           <a:noFill/>
         </p:spPr>
         <p:txBody>
-          <a:bodyPr wrap="square" anchor="t" lIns="0" rIns="0" tIns="0" bIns="0">
+          <a:bodyPr wrap="square" lIns="0" tIns="0" rIns="0" bIns="0" anchor="t">
             <a:spAutoFit/>
           </a:bodyPr>
           <a:lstStyle/>
@@ -10185,7 +11683,7 @@
           <a:noFill/>
         </p:spPr>
         <p:txBody>
-          <a:bodyPr wrap="square" anchor="t" lIns="0" rIns="0" tIns="0" bIns="0">
+          <a:bodyPr wrap="square" lIns="0" tIns="0" rIns="0" bIns="0" anchor="t">
             <a:spAutoFit/>
           </a:bodyPr>
           <a:lstStyle/>
@@ -10219,15 +11717,15 @@
         <p:spPr>
           <a:xfrm>
             <a:off x="11082528" y="6537960"/>
-            <a:ext cx="411480" cy="164592"/>
-          </a:xfrm>
-          <a:prstGeom prst="rect">
-            <a:avLst/>
-          </a:prstGeom>
-          <a:noFill/>
-        </p:spPr>
-        <p:txBody>
-          <a:bodyPr wrap="square" anchor="t" lIns="0" rIns="0" tIns="0" bIns="0">
+            <a:ext cx="411480" cy="123111"/>
+          </a:xfrm>
+          <a:prstGeom prst="rect">
+            <a:avLst/>
+          </a:prstGeom>
+          <a:noFill/>
+        </p:spPr>
+        <p:txBody>
+          <a:bodyPr wrap="square" lIns="0" tIns="0" rIns="0" bIns="0" anchor="t">
             <a:spAutoFit/>
           </a:bodyPr>
           <a:lstStyle/>
@@ -10241,14 +11739,20 @@
               </a:spcAft>
             </a:pPr>
             <a:r>
-              <a:rPr sz="800" b="1">
+              <a:rPr lang="en-US" sz="800" b="1">
                 <a:solidFill>
                   <a:srgbClr val="98A1A0"/>
                 </a:solidFill>
                 <a:latin typeface="Aptos"/>
               </a:rPr>
-              <a:t>05</a:t>
-            </a:r>
+              <a:t>06</a:t>
+            </a:r>
+            <a:endParaRPr sz="800" b="1">
+              <a:solidFill>
+                <a:srgbClr val="98A1A0"/>
+              </a:solidFill>
+              <a:latin typeface="Aptos"/>
+            </a:endParaRPr>
           </a:p>
         </p:txBody>
       </p:sp>
@@ -10260,8 +11764,8 @@
 </p:sld>
 </file>
 
-<file path=ppt/slides/slide6.xml><?xml version="1.0" encoding="utf-8"?>
-<p:sld xmlns:a="http://schemas.openxmlformats.org/drawingml/2006/main" xmlns:p="http://schemas.openxmlformats.org/presentationml/2006/main" xmlns:r="http://schemas.openxmlformats.org/officeDocument/2006/relationships">
+<file path=ppt/slides/slide7.xml><?xml version="1.0" encoding="utf-8"?>
+<p:sld xmlns:a="http://schemas.openxmlformats.org/drawingml/2006/main" xmlns:r="http://schemas.openxmlformats.org/officeDocument/2006/relationships" xmlns:p="http://schemas.openxmlformats.org/presentationml/2006/main">
   <p:cSld>
     <p:bg>
       <p:bgPr>
@@ -10277,7 +11781,14 @@
         <p:cNvGrpSpPr/>
         <p:nvPr/>
       </p:nvGrpSpPr>
-      <p:grpSpPr/>
+      <p:grpSpPr>
+        <a:xfrm>
+          <a:off x="0" y="0"/>
+          <a:ext cx="0" cy="0"/>
+          <a:chOff x="0" y="0"/>
+          <a:chExt cx="0" cy="0"/>
+        </a:xfrm>
+      </p:grpSpPr>
       <p:sp>
         <p:nvSpPr>
           <p:cNvPr id="2" name="TextBox 1"/>
@@ -10295,7 +11806,7 @@
           <a:noFill/>
         </p:spPr>
         <p:txBody>
-          <a:bodyPr wrap="square" anchor="t" lIns="0" rIns="0" tIns="0" bIns="0">
+          <a:bodyPr wrap="square" lIns="0" tIns="0" rIns="0" bIns="0" anchor="t">
             <a:spAutoFit/>
           </a:bodyPr>
           <a:lstStyle/>
@@ -10337,7 +11848,7 @@
           <a:noFill/>
         </p:spPr>
         <p:txBody>
-          <a:bodyPr wrap="square" anchor="t" lIns="0" rIns="0" tIns="0" bIns="0">
+          <a:bodyPr wrap="square" lIns="0" tIns="0" rIns="0" bIns="0" anchor="t">
             <a:spAutoFit/>
           </a:bodyPr>
           <a:lstStyle/>
@@ -10379,7 +11890,7 @@
           <a:noFill/>
         </p:spPr>
         <p:txBody>
-          <a:bodyPr wrap="square" anchor="t" lIns="0" rIns="0" tIns="0" bIns="0">
+          <a:bodyPr wrap="square" lIns="0" tIns="0" rIns="0" bIns="0" anchor="t">
             <a:spAutoFit/>
           </a:bodyPr>
           <a:lstStyle/>
@@ -10446,6 +11957,7 @@
           <a:lstStyle/>
           <a:p>
             <a:pPr algn="ctr"/>
+            <a:endParaRPr/>
           </a:p>
         </p:txBody>
       </p:sp>
@@ -10489,6 +12001,7 @@
           <a:lstStyle/>
           <a:p>
             <a:pPr algn="ctr"/>
+            <a:endParaRPr/>
           </a:p>
         </p:txBody>
       </p:sp>
@@ -10509,7 +12022,7 @@
           <a:noFill/>
         </p:spPr>
         <p:txBody>
-          <a:bodyPr wrap="square" anchor="t" lIns="0" rIns="0" tIns="0" bIns="0">
+          <a:bodyPr wrap="square" lIns="0" tIns="0" rIns="0" bIns="0" anchor="t">
             <a:spAutoFit/>
           </a:bodyPr>
           <a:lstStyle/>
@@ -10551,7 +12064,7 @@
           <a:noFill/>
         </p:spPr>
         <p:txBody>
-          <a:bodyPr wrap="square" anchor="t" lIns="0" rIns="0" tIns="0" bIns="0">
+          <a:bodyPr wrap="square" lIns="0" tIns="0" rIns="0" bIns="0" anchor="t">
             <a:spAutoFit/>
           </a:bodyPr>
           <a:lstStyle/>
@@ -10593,7 +12106,7 @@
           <a:noFill/>
         </p:spPr>
         <p:txBody>
-          <a:bodyPr wrap="square" anchor="t" lIns="0" rIns="0" tIns="0" bIns="0">
+          <a:bodyPr wrap="square" lIns="0" tIns="0" rIns="0" bIns="0" anchor="t">
             <a:spAutoFit/>
           </a:bodyPr>
           <a:lstStyle/>
@@ -10660,6 +12173,7 @@
           <a:lstStyle/>
           <a:p>
             <a:pPr algn="ctr"/>
+            <a:endParaRPr/>
           </a:p>
         </p:txBody>
       </p:sp>
@@ -10703,6 +12217,7 @@
           <a:lstStyle/>
           <a:p>
             <a:pPr algn="ctr"/>
+            <a:endParaRPr/>
           </a:p>
         </p:txBody>
       </p:sp>
@@ -10723,7 +12238,7 @@
           <a:noFill/>
         </p:spPr>
         <p:txBody>
-          <a:bodyPr wrap="square" anchor="t" lIns="0" rIns="0" tIns="0" bIns="0">
+          <a:bodyPr wrap="square" lIns="0" tIns="0" rIns="0" bIns="0" anchor="t">
             <a:spAutoFit/>
           </a:bodyPr>
           <a:lstStyle/>
@@ -10765,7 +12280,7 @@
           <a:noFill/>
         </p:spPr>
         <p:txBody>
-          <a:bodyPr wrap="square" anchor="t" lIns="0" rIns="0" tIns="0" bIns="0">
+          <a:bodyPr wrap="square" lIns="0" tIns="0" rIns="0" bIns="0" anchor="t">
             <a:spAutoFit/>
           </a:bodyPr>
           <a:lstStyle/>
@@ -10807,7 +12322,7 @@
           <a:noFill/>
         </p:spPr>
         <p:txBody>
-          <a:bodyPr wrap="square" anchor="t" lIns="0" rIns="0" tIns="0" bIns="0">
+          <a:bodyPr wrap="square" lIns="0" tIns="0" rIns="0" bIns="0" anchor="t">
             <a:spAutoFit/>
           </a:bodyPr>
           <a:lstStyle/>
@@ -10874,6 +12389,7 @@
           <a:lstStyle/>
           <a:p>
             <a:pPr algn="ctr"/>
+            <a:endParaRPr/>
           </a:p>
         </p:txBody>
       </p:sp>
@@ -10894,7 +12410,7 @@
           <a:noFill/>
         </p:spPr>
         <p:txBody>
-          <a:bodyPr wrap="square" anchor="t" lIns="0" rIns="0" tIns="0" bIns="0">
+          <a:bodyPr wrap="square" lIns="0" tIns="0" rIns="0" bIns="0" anchor="t">
             <a:spAutoFit/>
           </a:bodyPr>
           <a:lstStyle/>
@@ -10936,7 +12452,7 @@
           <a:noFill/>
         </p:spPr>
         <p:txBody>
-          <a:bodyPr wrap="square" anchor="t" lIns="0" rIns="0" tIns="0" bIns="0">
+          <a:bodyPr wrap="square" lIns="0" tIns="0" rIns="0" bIns="0" anchor="t">
             <a:spAutoFit/>
           </a:bodyPr>
           <a:lstStyle/>
@@ -10978,7 +12494,7 @@
           <a:noFill/>
         </p:spPr>
         <p:txBody>
-          <a:bodyPr wrap="square" anchor="t" lIns="0" rIns="0" tIns="0" bIns="0">
+          <a:bodyPr wrap="square" lIns="0" tIns="0" rIns="0" bIns="0" anchor="t">
             <a:spAutoFit/>
           </a:bodyPr>
           <a:lstStyle/>
@@ -11045,6 +12561,7 @@
           <a:lstStyle/>
           <a:p>
             <a:pPr algn="ctr"/>
+            <a:endParaRPr/>
           </a:p>
         </p:txBody>
       </p:sp>
@@ -11065,7 +12582,7 @@
           <a:noFill/>
         </p:spPr>
         <p:txBody>
-          <a:bodyPr wrap="square" anchor="t" lIns="0" rIns="0" tIns="0" bIns="0">
+          <a:bodyPr wrap="square" lIns="0" tIns="0" rIns="0" bIns="0" anchor="t">
             <a:spAutoFit/>
           </a:bodyPr>
           <a:lstStyle/>
@@ -11107,7 +12624,7 @@
           <a:noFill/>
         </p:spPr>
         <p:txBody>
-          <a:bodyPr wrap="square" anchor="t" lIns="0" rIns="0" tIns="0" bIns="0">
+          <a:bodyPr wrap="square" lIns="0" tIns="0" rIns="0" bIns="0" anchor="t">
             <a:spAutoFit/>
           </a:bodyPr>
           <a:lstStyle/>
@@ -11149,7 +12666,7 @@
           <a:noFill/>
         </p:spPr>
         <p:txBody>
-          <a:bodyPr wrap="square" anchor="t" lIns="0" rIns="0" tIns="0" bIns="0">
+          <a:bodyPr wrap="square" lIns="0" tIns="0" rIns="0" bIns="0" anchor="t">
             <a:spAutoFit/>
           </a:bodyPr>
           <a:lstStyle/>
@@ -11216,6 +12733,7 @@
           <a:lstStyle/>
           <a:p>
             <a:pPr algn="ctr"/>
+            <a:endParaRPr/>
           </a:p>
         </p:txBody>
       </p:sp>
@@ -11236,7 +12754,7 @@
           <a:noFill/>
         </p:spPr>
         <p:txBody>
-          <a:bodyPr wrap="square" anchor="t" lIns="0" rIns="0" tIns="0" bIns="0">
+          <a:bodyPr wrap="square" lIns="0" tIns="0" rIns="0" bIns="0" anchor="t">
             <a:spAutoFit/>
           </a:bodyPr>
           <a:lstStyle/>
@@ -11278,7 +12796,7 @@
           <a:noFill/>
         </p:spPr>
         <p:txBody>
-          <a:bodyPr wrap="square" anchor="t" lIns="0" rIns="0" tIns="0" bIns="0">
+          <a:bodyPr wrap="square" lIns="0" tIns="0" rIns="0" bIns="0" anchor="t">
             <a:spAutoFit/>
           </a:bodyPr>
           <a:lstStyle/>
@@ -11320,7 +12838,7 @@
           <a:noFill/>
         </p:spPr>
         <p:txBody>
-          <a:bodyPr wrap="square" anchor="t" lIns="0" rIns="0" tIns="0" bIns="0">
+          <a:bodyPr wrap="square" lIns="0" tIns="0" rIns="0" bIns="0" anchor="t">
             <a:spAutoFit/>
           </a:bodyPr>
           <a:lstStyle/>
@@ -11387,6 +12905,7 @@
           <a:lstStyle/>
           <a:p>
             <a:pPr algn="ctr"/>
+            <a:endParaRPr/>
           </a:p>
         </p:txBody>
       </p:sp>
@@ -11407,7 +12926,7 @@
           <a:noFill/>
         </p:spPr>
         <p:txBody>
-          <a:bodyPr wrap="square" anchor="t" lIns="0" rIns="0" tIns="0" bIns="0">
+          <a:bodyPr wrap="square" lIns="0" tIns="0" rIns="0" bIns="0" anchor="t">
             <a:spAutoFit/>
           </a:bodyPr>
           <a:lstStyle/>
@@ -11449,7 +12968,7 @@
           <a:noFill/>
         </p:spPr>
         <p:txBody>
-          <a:bodyPr wrap="square" anchor="t" lIns="0" rIns="0" tIns="0" bIns="0">
+          <a:bodyPr wrap="square" lIns="0" tIns="0" rIns="0" bIns="0" anchor="t">
             <a:spAutoFit/>
           </a:bodyPr>
           <a:lstStyle/>
@@ -11491,7 +13010,7 @@
           <a:noFill/>
         </p:spPr>
         <p:txBody>
-          <a:bodyPr wrap="square" anchor="t" lIns="0" rIns="0" tIns="0" bIns="0">
+          <a:bodyPr wrap="square" lIns="0" tIns="0" rIns="0" bIns="0" anchor="t">
             <a:spAutoFit/>
           </a:bodyPr>
           <a:lstStyle/>
@@ -11558,6 +13077,7 @@
           <a:lstStyle/>
           <a:p>
             <a:pPr algn="ctr"/>
+            <a:endParaRPr/>
           </a:p>
         </p:txBody>
       </p:sp>
@@ -11578,7 +13098,7 @@
           <a:noFill/>
         </p:spPr>
         <p:txBody>
-          <a:bodyPr wrap="square" anchor="t" lIns="0" rIns="0" tIns="0" bIns="0">
+          <a:bodyPr wrap="square" lIns="0" tIns="0" rIns="0" bIns="0" anchor="t">
             <a:spAutoFit/>
           </a:bodyPr>
           <a:lstStyle/>
@@ -11620,7 +13140,7 @@
           <a:noFill/>
         </p:spPr>
         <p:txBody>
-          <a:bodyPr wrap="square" anchor="t" lIns="0" rIns="0" tIns="0" bIns="0">
+          <a:bodyPr wrap="square" lIns="0" tIns="0" rIns="0" bIns="0" anchor="t">
             <a:spAutoFit/>
           </a:bodyPr>
           <a:lstStyle/>
@@ -11654,15 +13174,15 @@
         <p:spPr>
           <a:xfrm>
             <a:off x="11082528" y="6537960"/>
-            <a:ext cx="411480" cy="164592"/>
-          </a:xfrm>
-          <a:prstGeom prst="rect">
-            <a:avLst/>
-          </a:prstGeom>
-          <a:noFill/>
-        </p:spPr>
-        <p:txBody>
-          <a:bodyPr wrap="square" anchor="t" lIns="0" rIns="0" tIns="0" bIns="0">
+            <a:ext cx="411480" cy="123111"/>
+          </a:xfrm>
+          <a:prstGeom prst="rect">
+            <a:avLst/>
+          </a:prstGeom>
+          <a:noFill/>
+        </p:spPr>
+        <p:txBody>
+          <a:bodyPr wrap="square" lIns="0" tIns="0" rIns="0" bIns="0" anchor="t">
             <a:spAutoFit/>
           </a:bodyPr>
           <a:lstStyle/>
@@ -11676,14 +13196,20 @@
               </a:spcAft>
             </a:pPr>
             <a:r>
-              <a:rPr sz="800" b="1">
+              <a:rPr lang="en-US" sz="800" b="1">
                 <a:solidFill>
                   <a:srgbClr val="677074"/>
                 </a:solidFill>
                 <a:latin typeface="Aptos"/>
               </a:rPr>
-              <a:t>06</a:t>
-            </a:r>
+              <a:t>07</a:t>
+            </a:r>
+            <a:endParaRPr sz="800" b="1">
+              <a:solidFill>
+                <a:srgbClr val="677074"/>
+              </a:solidFill>
+              <a:latin typeface="Aptos"/>
+            </a:endParaRPr>
           </a:p>
         </p:txBody>
       </p:sp>
@@ -11695,8 +13221,8 @@
 </p:sld>
 </file>
 
-<file path=ppt/slides/slide7.xml><?xml version="1.0" encoding="utf-8"?>
-<p:sld xmlns:a="http://schemas.openxmlformats.org/drawingml/2006/main" xmlns:p="http://schemas.openxmlformats.org/presentationml/2006/main" xmlns:r="http://schemas.openxmlformats.org/officeDocument/2006/relationships">
+<file path=ppt/slides/slide8.xml><?xml version="1.0" encoding="utf-8"?>
+<p:sld xmlns:a="http://schemas.openxmlformats.org/drawingml/2006/main" xmlns:r="http://schemas.openxmlformats.org/officeDocument/2006/relationships" xmlns:p="http://schemas.openxmlformats.org/presentationml/2006/main">
   <p:cSld>
     <p:bg>
       <p:bgPr>
@@ -11712,7 +13238,14 @@
         <p:cNvGrpSpPr/>
         <p:nvPr/>
       </p:nvGrpSpPr>
-      <p:grpSpPr/>
+      <p:grpSpPr>
+        <a:xfrm>
+          <a:off x="0" y="0"/>
+          <a:ext cx="0" cy="0"/>
+          <a:chOff x="0" y="0"/>
+          <a:chExt cx="0" cy="0"/>
+        </a:xfrm>
+      </p:grpSpPr>
       <p:sp>
         <p:nvSpPr>
           <p:cNvPr id="2" name="TextBox 1"/>
@@ -11730,7 +13263,7 @@
           <a:noFill/>
         </p:spPr>
         <p:txBody>
-          <a:bodyPr wrap="square" anchor="t" lIns="0" rIns="0" tIns="0" bIns="0">
+          <a:bodyPr wrap="square" lIns="0" tIns="0" rIns="0" bIns="0" anchor="t">
             <a:spAutoFit/>
           </a:bodyPr>
           <a:lstStyle/>
@@ -11772,7 +13305,7 @@
           <a:noFill/>
         </p:spPr>
         <p:txBody>
-          <a:bodyPr wrap="square" anchor="t" lIns="0" rIns="0" tIns="0" bIns="0">
+          <a:bodyPr wrap="square" lIns="0" tIns="0" rIns="0" bIns="0" anchor="t">
             <a:spAutoFit/>
           </a:bodyPr>
           <a:lstStyle/>
@@ -11814,7 +13347,7 @@
           <a:noFill/>
         </p:spPr>
         <p:txBody>
-          <a:bodyPr wrap="square" anchor="t" lIns="0" rIns="0" tIns="0" bIns="0">
+          <a:bodyPr wrap="square" lIns="0" tIns="0" rIns="0" bIns="0" anchor="t">
             <a:spAutoFit/>
           </a:bodyPr>
           <a:lstStyle/>
@@ -11881,6 +13414,7 @@
           <a:lstStyle/>
           <a:p>
             <a:pPr algn="ctr"/>
+            <a:endParaRPr/>
           </a:p>
         </p:txBody>
       </p:sp>
@@ -11924,6 +13458,7 @@
           <a:lstStyle/>
           <a:p>
             <a:pPr algn="ctr"/>
+            <a:endParaRPr/>
           </a:p>
         </p:txBody>
       </p:sp>
@@ -11944,7 +13479,7 @@
           <a:noFill/>
         </p:spPr>
         <p:txBody>
-          <a:bodyPr wrap="square" anchor="t" lIns="0" rIns="0" tIns="0" bIns="0">
+          <a:bodyPr wrap="square" lIns="0" tIns="0" rIns="0" bIns="0" anchor="t">
             <a:spAutoFit/>
           </a:bodyPr>
           <a:lstStyle/>
@@ -11986,7 +13521,7 @@
           <a:noFill/>
         </p:spPr>
         <p:txBody>
-          <a:bodyPr wrap="square" anchor="t" lIns="0" rIns="0" tIns="0" bIns="0">
+          <a:bodyPr wrap="square" lIns="0" tIns="0" rIns="0" bIns="0" anchor="t">
             <a:spAutoFit/>
           </a:bodyPr>
           <a:lstStyle/>
@@ -12028,7 +13563,7 @@
           <a:noFill/>
         </p:spPr>
         <p:txBody>
-          <a:bodyPr wrap="square" anchor="t" lIns="0" rIns="0" tIns="0" bIns="0">
+          <a:bodyPr wrap="square" lIns="0" tIns="0" rIns="0" bIns="0" anchor="t">
             <a:spAutoFit/>
           </a:bodyPr>
           <a:lstStyle/>
@@ -12070,7 +13605,7 @@
           <a:noFill/>
         </p:spPr>
         <p:txBody>
-          <a:bodyPr wrap="square" anchor="t" lIns="0" rIns="0" tIns="0" bIns="0">
+          <a:bodyPr wrap="square" lIns="0" tIns="0" rIns="0" bIns="0" anchor="t">
             <a:spAutoFit/>
           </a:bodyPr>
           <a:lstStyle/>
@@ -12137,6 +13672,7 @@
           <a:lstStyle/>
           <a:p>
             <a:pPr algn="ctr"/>
+            <a:endParaRPr/>
           </a:p>
         </p:txBody>
       </p:sp>
@@ -12180,6 +13716,7 @@
           <a:lstStyle/>
           <a:p>
             <a:pPr algn="ctr"/>
+            <a:endParaRPr/>
           </a:p>
         </p:txBody>
       </p:sp>
@@ -12200,7 +13737,7 @@
           <a:noFill/>
         </p:spPr>
         <p:txBody>
-          <a:bodyPr wrap="square" anchor="t" lIns="0" rIns="0" tIns="0" bIns="0">
+          <a:bodyPr wrap="square" lIns="0" tIns="0" rIns="0" bIns="0" anchor="t">
             <a:spAutoFit/>
           </a:bodyPr>
           <a:lstStyle/>
@@ -12242,7 +13779,7 @@
           <a:noFill/>
         </p:spPr>
         <p:txBody>
-          <a:bodyPr wrap="square" anchor="t" lIns="0" rIns="0" tIns="0" bIns="0">
+          <a:bodyPr wrap="square" lIns="0" tIns="0" rIns="0" bIns="0" anchor="t">
             <a:spAutoFit/>
           </a:bodyPr>
           <a:lstStyle/>
@@ -12284,7 +13821,7 @@
           <a:noFill/>
         </p:spPr>
         <p:txBody>
-          <a:bodyPr wrap="square" anchor="t" lIns="0" rIns="0" tIns="0" bIns="0">
+          <a:bodyPr wrap="square" lIns="0" tIns="0" rIns="0" bIns="0" anchor="t">
             <a:spAutoFit/>
           </a:bodyPr>
           <a:lstStyle/>
@@ -12326,7 +13863,7 @@
           <a:noFill/>
         </p:spPr>
         <p:txBody>
-          <a:bodyPr wrap="square" anchor="t" lIns="0" rIns="0" tIns="0" bIns="0">
+          <a:bodyPr wrap="square" lIns="0" tIns="0" rIns="0" bIns="0" anchor="t">
             <a:spAutoFit/>
           </a:bodyPr>
           <a:lstStyle/>
@@ -12393,6 +13930,7 @@
           <a:lstStyle/>
           <a:p>
             <a:pPr algn="ctr"/>
+            <a:endParaRPr/>
           </a:p>
         </p:txBody>
       </p:sp>
@@ -12436,6 +13974,7 @@
           <a:lstStyle/>
           <a:p>
             <a:pPr algn="ctr"/>
+            <a:endParaRPr/>
           </a:p>
         </p:txBody>
       </p:sp>
@@ -12456,7 +13995,7 @@
           <a:noFill/>
         </p:spPr>
         <p:txBody>
-          <a:bodyPr wrap="square" anchor="t" lIns="0" rIns="0" tIns="0" bIns="0">
+          <a:bodyPr wrap="square" lIns="0" tIns="0" rIns="0" bIns="0" anchor="t">
             <a:spAutoFit/>
           </a:bodyPr>
           <a:lstStyle/>
@@ -12498,7 +14037,7 @@
           <a:noFill/>
         </p:spPr>
         <p:txBody>
-          <a:bodyPr wrap="square" anchor="t" lIns="0" rIns="0" tIns="0" bIns="0">
+          <a:bodyPr wrap="square" lIns="0" tIns="0" rIns="0" bIns="0" anchor="t">
             <a:spAutoFit/>
           </a:bodyPr>
           <a:lstStyle/>
@@ -12540,7 +14079,7 @@
           <a:noFill/>
         </p:spPr>
         <p:txBody>
-          <a:bodyPr wrap="square" anchor="t" lIns="0" rIns="0" tIns="0" bIns="0">
+          <a:bodyPr wrap="square" lIns="0" tIns="0" rIns="0" bIns="0" anchor="t">
             <a:spAutoFit/>
           </a:bodyPr>
           <a:lstStyle/>
@@ -12582,7 +14121,7 @@
           <a:noFill/>
         </p:spPr>
         <p:txBody>
-          <a:bodyPr wrap="square" anchor="t" lIns="0" rIns="0" tIns="0" bIns="0">
+          <a:bodyPr wrap="square" lIns="0" tIns="0" rIns="0" bIns="0" anchor="t">
             <a:spAutoFit/>
           </a:bodyPr>
           <a:lstStyle/>
@@ -12649,6 +14188,7 @@
           <a:lstStyle/>
           <a:p>
             <a:pPr algn="ctr"/>
+            <a:endParaRPr/>
           </a:p>
         </p:txBody>
       </p:sp>
@@ -12669,7 +14209,7 @@
           <a:noFill/>
         </p:spPr>
         <p:txBody>
-          <a:bodyPr wrap="square" anchor="t" lIns="0" rIns="0" tIns="0" bIns="0">
+          <a:bodyPr wrap="square" lIns="0" tIns="0" rIns="0" bIns="0" anchor="t">
             <a:spAutoFit/>
           </a:bodyPr>
           <a:lstStyle/>
@@ -12711,7 +14251,7 @@
           <a:noFill/>
         </p:spPr>
         <p:txBody>
-          <a:bodyPr wrap="square" anchor="t" lIns="0" rIns="0" tIns="0" bIns="0">
+          <a:bodyPr wrap="square" lIns="0" tIns="0" rIns="0" bIns="0" anchor="t">
             <a:spAutoFit/>
           </a:bodyPr>
           <a:lstStyle/>
@@ -12745,15 +14285,15 @@
         <p:spPr>
           <a:xfrm>
             <a:off x="11082528" y="6537960"/>
-            <a:ext cx="411480" cy="164592"/>
-          </a:xfrm>
-          <a:prstGeom prst="rect">
-            <a:avLst/>
-          </a:prstGeom>
-          <a:noFill/>
-        </p:spPr>
-        <p:txBody>
-          <a:bodyPr wrap="square" anchor="t" lIns="0" rIns="0" tIns="0" bIns="0">
+            <a:ext cx="411480" cy="123111"/>
+          </a:xfrm>
+          <a:prstGeom prst="rect">
+            <a:avLst/>
+          </a:prstGeom>
+          <a:noFill/>
+        </p:spPr>
+        <p:txBody>
+          <a:bodyPr wrap="square" lIns="0" tIns="0" rIns="0" bIns="0" anchor="t">
             <a:spAutoFit/>
           </a:bodyPr>
           <a:lstStyle/>
@@ -12767,14 +14307,20 @@
               </a:spcAft>
             </a:pPr>
             <a:r>
-              <a:rPr sz="800" b="1">
+              <a:rPr lang="en-US" sz="800" b="1">
                 <a:solidFill>
                   <a:srgbClr val="98A1A0"/>
                 </a:solidFill>
                 <a:latin typeface="Aptos"/>
               </a:rPr>
-              <a:t>07</a:t>
-            </a:r>
+              <a:t>08</a:t>
+            </a:r>
+            <a:endParaRPr sz="800" b="1">
+              <a:solidFill>
+                <a:srgbClr val="98A1A0"/>
+              </a:solidFill>
+              <a:latin typeface="Aptos"/>
+            </a:endParaRPr>
           </a:p>
         </p:txBody>
       </p:sp>
@@ -12786,8 +14332,8 @@
 </p:sld>
 </file>
 
-<file path=ppt/slides/slide8.xml><?xml version="1.0" encoding="utf-8"?>
-<p:sld xmlns:a="http://schemas.openxmlformats.org/drawingml/2006/main" xmlns:p="http://schemas.openxmlformats.org/presentationml/2006/main" xmlns:r="http://schemas.openxmlformats.org/officeDocument/2006/relationships">
+<file path=ppt/slides/slide9.xml><?xml version="1.0" encoding="utf-8"?>
+<p:sld xmlns:a="http://schemas.openxmlformats.org/drawingml/2006/main" xmlns:r="http://schemas.openxmlformats.org/officeDocument/2006/relationships" xmlns:p="http://schemas.openxmlformats.org/presentationml/2006/main">
   <p:cSld>
     <p:bg>
       <p:bgPr>
@@ -12803,7 +14349,14 @@
         <p:cNvGrpSpPr/>
         <p:nvPr/>
       </p:nvGrpSpPr>
-      <p:grpSpPr/>
+      <p:grpSpPr>
+        <a:xfrm>
+          <a:off x="0" y="0"/>
+          <a:ext cx="0" cy="0"/>
+          <a:chOff x="0" y="0"/>
+          <a:chExt cx="0" cy="0"/>
+        </a:xfrm>
+      </p:grpSpPr>
       <p:sp>
         <p:nvSpPr>
           <p:cNvPr id="2" name="TextBox 1"/>
@@ -12821,7 +14374,7 @@
           <a:noFill/>
         </p:spPr>
         <p:txBody>
-          <a:bodyPr wrap="square" anchor="t" lIns="0" rIns="0" tIns="0" bIns="0">
+          <a:bodyPr wrap="square" lIns="0" tIns="0" rIns="0" bIns="0" anchor="t">
             <a:spAutoFit/>
           </a:bodyPr>
           <a:lstStyle/>
@@ -12863,7 +14416,7 @@
           <a:noFill/>
         </p:spPr>
         <p:txBody>
-          <a:bodyPr wrap="square" anchor="t" lIns="0" rIns="0" tIns="0" bIns="0">
+          <a:bodyPr wrap="square" lIns="0" tIns="0" rIns="0" bIns="0" anchor="t">
             <a:spAutoFit/>
           </a:bodyPr>
           <a:lstStyle/>
@@ -12905,7 +14458,7 @@
           <a:noFill/>
         </p:spPr>
         <p:txBody>
-          <a:bodyPr wrap="square" anchor="t" lIns="0" rIns="0" tIns="0" bIns="0">
+          <a:bodyPr wrap="square" lIns="0" tIns="0" rIns="0" bIns="0" anchor="t">
             <a:spAutoFit/>
           </a:bodyPr>
           <a:lstStyle/>
@@ -12972,6 +14525,7 @@
           <a:lstStyle/>
           <a:p>
             <a:pPr algn="ctr"/>
+            <a:endParaRPr/>
           </a:p>
         </p:txBody>
       </p:sp>
@@ -13015,6 +14569,7 @@
           <a:lstStyle/>
           <a:p>
             <a:pPr algn="ctr"/>
+            <a:endParaRPr/>
           </a:p>
         </p:txBody>
       </p:sp>
@@ -13035,7 +14590,7 @@
           <a:noFill/>
         </p:spPr>
         <p:txBody>
-          <a:bodyPr wrap="square" anchor="t" lIns="0" rIns="0" tIns="0" bIns="0">
+          <a:bodyPr wrap="square" lIns="0" tIns="0" rIns="0" bIns="0" anchor="t">
             <a:spAutoFit/>
           </a:bodyPr>
           <a:lstStyle/>
@@ -13077,7 +14632,7 @@
           <a:noFill/>
         </p:spPr>
         <p:txBody>
-          <a:bodyPr wrap="square" anchor="t" lIns="0" rIns="0" tIns="0" bIns="0">
+          <a:bodyPr wrap="square" lIns="0" tIns="0" rIns="0" bIns="0" anchor="t">
             <a:spAutoFit/>
           </a:bodyPr>
           <a:lstStyle/>
@@ -13119,7 +14674,7 @@
           <a:noFill/>
         </p:spPr>
         <p:txBody>
-          <a:bodyPr wrap="square" anchor="t" lIns="0" rIns="0" tIns="0" bIns="0">
+          <a:bodyPr wrap="square" lIns="0" tIns="0" rIns="0" bIns="0" anchor="t">
             <a:spAutoFit/>
           </a:bodyPr>
           <a:lstStyle/>
@@ -13186,6 +14741,7 @@
           <a:lstStyle/>
           <a:p>
             <a:pPr algn="ctr"/>
+            <a:endParaRPr/>
           </a:p>
         </p:txBody>
       </p:sp>
@@ -13229,6 +14785,7 @@
           <a:lstStyle/>
           <a:p>
             <a:pPr algn="ctr"/>
+            <a:endParaRPr/>
           </a:p>
         </p:txBody>
       </p:sp>
@@ -13249,7 +14806,7 @@
           <a:noFill/>
         </p:spPr>
         <p:txBody>
-          <a:bodyPr wrap="square" anchor="t" lIns="0" rIns="0" tIns="0" bIns="0">
+          <a:bodyPr wrap="square" lIns="0" tIns="0" rIns="0" bIns="0" anchor="t">
             <a:spAutoFit/>
           </a:bodyPr>
           <a:lstStyle/>
@@ -13291,7 +14848,7 @@
           <a:noFill/>
         </p:spPr>
         <p:txBody>
-          <a:bodyPr wrap="square" anchor="t" lIns="0" rIns="0" tIns="0" bIns="0">
+          <a:bodyPr wrap="square" lIns="0" tIns="0" rIns="0" bIns="0" anchor="t">
             <a:spAutoFit/>
           </a:bodyPr>
           <a:lstStyle/>
@@ -13333,7 +14890,7 @@
           <a:noFill/>
         </p:spPr>
         <p:txBody>
-          <a:bodyPr wrap="square" anchor="t" lIns="0" rIns="0" tIns="0" bIns="0">
+          <a:bodyPr wrap="square" lIns="0" tIns="0" rIns="0" bIns="0" anchor="t">
             <a:spAutoFit/>
           </a:bodyPr>
           <a:lstStyle/>
@@ -13400,6 +14957,7 @@
           <a:lstStyle/>
           <a:p>
             <a:pPr algn="ctr"/>
+            <a:endParaRPr/>
           </a:p>
         </p:txBody>
       </p:sp>
@@ -13443,6 +15001,7 @@
           <a:lstStyle/>
           <a:p>
             <a:pPr algn="ctr"/>
+            <a:endParaRPr/>
           </a:p>
         </p:txBody>
       </p:sp>
@@ -13463,7 +15022,7 @@
           <a:noFill/>
         </p:spPr>
         <p:txBody>
-          <a:bodyPr wrap="square" anchor="t" lIns="0" rIns="0" tIns="0" bIns="0">
+          <a:bodyPr wrap="square" lIns="0" tIns="0" rIns="0" bIns="0" anchor="t">
             <a:spAutoFit/>
           </a:bodyPr>
           <a:lstStyle/>
@@ -13505,7 +15064,7 @@
           <a:noFill/>
         </p:spPr>
         <p:txBody>
-          <a:bodyPr wrap="square" anchor="t" lIns="0" rIns="0" tIns="0" bIns="0">
+          <a:bodyPr wrap="square" lIns="0" tIns="0" rIns="0" bIns="0" anchor="t">
             <a:spAutoFit/>
           </a:bodyPr>
           <a:lstStyle/>
@@ -13547,7 +15106,7 @@
           <a:noFill/>
         </p:spPr>
         <p:txBody>
-          <a:bodyPr wrap="square" anchor="t" lIns="0" rIns="0" tIns="0" bIns="0">
+          <a:bodyPr wrap="square" lIns="0" tIns="0" rIns="0" bIns="0" anchor="t">
             <a:spAutoFit/>
           </a:bodyPr>
           <a:lstStyle/>
@@ -13614,6 +15173,7 @@
           <a:lstStyle/>
           <a:p>
             <a:pPr algn="ctr"/>
+            <a:endParaRPr/>
           </a:p>
         </p:txBody>
       </p:sp>
@@ -13657,6 +15217,7 @@
           <a:lstStyle/>
           <a:p>
             <a:pPr algn="ctr"/>
+            <a:endParaRPr/>
           </a:p>
         </p:txBody>
       </p:sp>
@@ -13677,7 +15238,7 @@
           <a:noFill/>
         </p:spPr>
         <p:txBody>
-          <a:bodyPr wrap="square" anchor="t" lIns="0" rIns="0" tIns="0" bIns="0">
+          <a:bodyPr wrap="square" lIns="0" tIns="0" rIns="0" bIns="0" anchor="t">
             <a:spAutoFit/>
           </a:bodyPr>
           <a:lstStyle/>
@@ -13719,7 +15280,7 @@
           <a:noFill/>
         </p:spPr>
         <p:txBody>
-          <a:bodyPr wrap="square" anchor="t" lIns="0" rIns="0" tIns="0" bIns="0">
+          <a:bodyPr wrap="square" lIns="0" tIns="0" rIns="0" bIns="0" anchor="t">
             <a:spAutoFit/>
           </a:bodyPr>
           <a:lstStyle/>
@@ -13761,7 +15322,7 @@
           <a:noFill/>
         </p:spPr>
         <p:txBody>
-          <a:bodyPr wrap="square" anchor="t" lIns="0" rIns="0" tIns="0" bIns="0">
+          <a:bodyPr wrap="square" lIns="0" tIns="0" rIns="0" bIns="0" anchor="t">
             <a:spAutoFit/>
           </a:bodyPr>
           <a:lstStyle/>
@@ -13828,6 +15389,7 @@
           <a:lstStyle/>
           <a:p>
             <a:pPr algn="ctr"/>
+            <a:endParaRPr/>
           </a:p>
         </p:txBody>
       </p:sp>
@@ -13871,6 +15433,7 @@
           <a:lstStyle/>
           <a:p>
             <a:pPr algn="ctr"/>
+            <a:endParaRPr/>
           </a:p>
         </p:txBody>
       </p:sp>
@@ -13891,7 +15454,7 @@
           <a:noFill/>
         </p:spPr>
         <p:txBody>
-          <a:bodyPr wrap="square" anchor="t" lIns="0" rIns="0" tIns="0" bIns="0">
+          <a:bodyPr wrap="square" lIns="0" tIns="0" rIns="0" bIns="0" anchor="t">
             <a:spAutoFit/>
           </a:bodyPr>
           <a:lstStyle/>
@@ -13933,7 +15496,7 @@
           <a:noFill/>
         </p:spPr>
         <p:txBody>
-          <a:bodyPr wrap="square" anchor="t" lIns="0" rIns="0" tIns="0" bIns="0">
+          <a:bodyPr wrap="square" lIns="0" tIns="0" rIns="0" bIns="0" anchor="t">
             <a:spAutoFit/>
           </a:bodyPr>
           <a:lstStyle/>
@@ -13975,7 +15538,7 @@
           <a:noFill/>
         </p:spPr>
         <p:txBody>
-          <a:bodyPr wrap="square" anchor="t" lIns="0" rIns="0" tIns="0" bIns="0">
+          <a:bodyPr wrap="square" lIns="0" tIns="0" rIns="0" bIns="0" anchor="t">
             <a:spAutoFit/>
           </a:bodyPr>
           <a:lstStyle/>
@@ -14042,6 +15605,7 @@
           <a:lstStyle/>
           <a:p>
             <a:pPr algn="ctr"/>
+            <a:endParaRPr/>
           </a:p>
         </p:txBody>
       </p:sp>
@@ -14085,6 +15649,7 @@
           <a:lstStyle/>
           <a:p>
             <a:pPr algn="ctr"/>
+            <a:endParaRPr/>
           </a:p>
         </p:txBody>
       </p:sp>
@@ -14105,7 +15670,7 @@
           <a:noFill/>
         </p:spPr>
         <p:txBody>
-          <a:bodyPr wrap="square" anchor="t" lIns="0" rIns="0" tIns="0" bIns="0">
+          <a:bodyPr wrap="square" lIns="0" tIns="0" rIns="0" bIns="0" anchor="t">
             <a:spAutoFit/>
           </a:bodyPr>
           <a:lstStyle/>
@@ -14147,7 +15712,7 @@
           <a:noFill/>
         </p:spPr>
         <p:txBody>
-          <a:bodyPr wrap="square" anchor="t" lIns="0" rIns="0" tIns="0" bIns="0">
+          <a:bodyPr wrap="square" lIns="0" tIns="0" rIns="0" bIns="0" anchor="t">
             <a:spAutoFit/>
           </a:bodyPr>
           <a:lstStyle/>
@@ -14189,7 +15754,7 @@
           <a:noFill/>
         </p:spPr>
         <p:txBody>
-          <a:bodyPr wrap="square" anchor="t" lIns="0" rIns="0" tIns="0" bIns="0">
+          <a:bodyPr wrap="square" lIns="0" tIns="0" rIns="0" bIns="0" anchor="t">
             <a:spAutoFit/>
           </a:bodyPr>
           <a:lstStyle/>
@@ -14256,6 +15821,7 @@
           <a:lstStyle/>
           <a:p>
             <a:pPr algn="ctr"/>
+            <a:endParaRPr/>
           </a:p>
         </p:txBody>
       </p:sp>
@@ -14276,7 +15842,7 @@
           <a:noFill/>
         </p:spPr>
         <p:txBody>
-          <a:bodyPr wrap="square" anchor="t" lIns="0" rIns="0" tIns="0" bIns="0">
+          <a:bodyPr wrap="square" lIns="0" tIns="0" rIns="0" bIns="0" anchor="t">
             <a:spAutoFit/>
           </a:bodyPr>
           <a:lstStyle/>
@@ -14318,7 +15884,7 @@
           <a:noFill/>
         </p:spPr>
         <p:txBody>
-          <a:bodyPr wrap="square" anchor="t" lIns="0" rIns="0" tIns="0" bIns="0">
+          <a:bodyPr wrap="square" lIns="0" tIns="0" rIns="0" bIns="0" anchor="t">
             <a:spAutoFit/>
           </a:bodyPr>
           <a:lstStyle/>
@@ -14360,7 +15926,7 @@
           <a:noFill/>
         </p:spPr>
         <p:txBody>
-          <a:bodyPr wrap="square" anchor="t" lIns="0" rIns="0" tIns="0" bIns="0">
+          <a:bodyPr wrap="square" lIns="0" tIns="0" rIns="0" bIns="0" anchor="t">
             <a:spAutoFit/>
           </a:bodyPr>
           <a:lstStyle/>
@@ -14394,15 +15960,15 @@
         <p:spPr>
           <a:xfrm>
             <a:off x="11082528" y="6537960"/>
-            <a:ext cx="411480" cy="164592"/>
-          </a:xfrm>
-          <a:prstGeom prst="rect">
-            <a:avLst/>
-          </a:prstGeom>
-          <a:noFill/>
-        </p:spPr>
-        <p:txBody>
-          <a:bodyPr wrap="square" anchor="t" lIns="0" rIns="0" tIns="0" bIns="0">
+            <a:ext cx="411480" cy="123111"/>
+          </a:xfrm>
+          <a:prstGeom prst="rect">
+            <a:avLst/>
+          </a:prstGeom>
+          <a:noFill/>
+        </p:spPr>
+        <p:txBody>
+          <a:bodyPr wrap="square" lIns="0" tIns="0" rIns="0" bIns="0" anchor="t">
             <a:spAutoFit/>
           </a:bodyPr>
           <a:lstStyle/>
@@ -14416,763 +15982,20 @@
               </a:spcAft>
             </a:pPr>
             <a:r>
-              <a:rPr sz="800" b="1">
+              <a:rPr lang="en-US" sz="800" b="1">
                 <a:solidFill>
                   <a:srgbClr val="677074"/>
                 </a:solidFill>
                 <a:latin typeface="Aptos"/>
               </a:rPr>
-              <a:t>08</a:t>
-            </a:r>
-          </a:p>
-        </p:txBody>
-      </p:sp>
-    </p:spTree>
-  </p:cSld>
-  <p:clrMapOvr>
-    <a:masterClrMapping/>
-  </p:clrMapOvr>
-</p:sld>
-</file>
-
-<file path=ppt/slides/slide9.xml><?xml version="1.0" encoding="utf-8"?>
-<p:sld xmlns:a="http://schemas.openxmlformats.org/drawingml/2006/main" xmlns:p="http://schemas.openxmlformats.org/presentationml/2006/main" xmlns:r="http://schemas.openxmlformats.org/officeDocument/2006/relationships">
-  <p:cSld>
-    <p:bg>
-      <p:bgPr>
-        <a:solidFill>
-          <a:srgbClr val="FFFFFF"/>
-        </a:solidFill>
-        <a:effectLst/>
-      </p:bgPr>
-    </p:bg>
-    <p:spTree>
-      <p:nvGrpSpPr>
-        <p:cNvPr id="1" name=""/>
-        <p:cNvGrpSpPr/>
-        <p:nvPr/>
-      </p:nvGrpSpPr>
-      <p:grpSpPr/>
-      <p:sp>
-        <p:nvSpPr>
-          <p:cNvPr id="2" name="TextBox 1"/>
-          <p:cNvSpPr txBox="1"/>
-          <p:nvPr/>
-        </p:nvSpPr>
-        <p:spPr>
-          <a:xfrm>
-            <a:off x="658368" y="347472"/>
-            <a:ext cx="6583680" cy="228600"/>
-          </a:xfrm>
-          <a:prstGeom prst="rect">
-            <a:avLst/>
-          </a:prstGeom>
-          <a:noFill/>
-        </p:spPr>
-        <p:txBody>
-          <a:bodyPr wrap="square" anchor="t" lIns="0" rIns="0" tIns="0" bIns="0">
-            <a:spAutoFit/>
-          </a:bodyPr>
-          <a:lstStyle/>
-          <a:p>
-            <a:pPr algn="l">
-              <a:lnSpc>
-                <a:spcPct val="100000"/>
-              </a:lnSpc>
-              <a:spcAft>
-                <a:spcPts val="0"/>
-              </a:spcAft>
-            </a:pPr>
-            <a:r>
-              <a:rPr sz="1000" b="1">
-                <a:solidFill>
-                  <a:srgbClr val="00766C"/>
-                </a:solidFill>
-                <a:latin typeface="Aptos"/>
-              </a:rPr>
-              <a:t>LIVE DEMO</a:t>
-            </a:r>
-          </a:p>
-        </p:txBody>
-      </p:sp>
-      <p:sp>
-        <p:nvSpPr>
-          <p:cNvPr id="3" name="TextBox 2"/>
-          <p:cNvSpPr txBox="1"/>
-          <p:nvPr/>
-        </p:nvSpPr>
-        <p:spPr>
-          <a:xfrm>
-            <a:off x="658368" y="713232"/>
-            <a:ext cx="10789920" cy="566928"/>
-          </a:xfrm>
-          <a:prstGeom prst="rect">
-            <a:avLst/>
-          </a:prstGeom>
-          <a:noFill/>
-        </p:spPr>
-        <p:txBody>
-          <a:bodyPr wrap="square" anchor="t" lIns="0" rIns="0" tIns="0" bIns="0">
-            <a:spAutoFit/>
-          </a:bodyPr>
-          <a:lstStyle/>
-          <a:p>
-            <a:pPr algn="l">
-              <a:lnSpc>
-                <a:spcPct val="100000"/>
-              </a:lnSpc>
-              <a:spcAft>
-                <a:spcPts val="0"/>
-              </a:spcAft>
-            </a:pPr>
-            <a:r>
-              <a:rPr sz="3100" b="1">
-                <a:solidFill>
-                  <a:srgbClr val="181D22"/>
-                </a:solidFill>
-                <a:latin typeface="Aptos Display"/>
-              </a:rPr>
-              <a:t>From empty folder to working project in just a few prompts.</a:t>
-            </a:r>
-          </a:p>
-        </p:txBody>
-      </p:sp>
-      <p:sp>
-        <p:nvSpPr>
-          <p:cNvPr id="4" name="TextBox 3"/>
-          <p:cNvSpPr txBox="1"/>
-          <p:nvPr/>
-        </p:nvSpPr>
-        <p:spPr>
-          <a:xfrm>
-            <a:off x="658368" y="1335024"/>
-            <a:ext cx="10469880" cy="438912"/>
-          </a:xfrm>
-          <a:prstGeom prst="rect">
-            <a:avLst/>
-          </a:prstGeom>
-          <a:noFill/>
-        </p:spPr>
-        <p:txBody>
-          <a:bodyPr wrap="square" anchor="t" lIns="0" rIns="0" tIns="0" bIns="0">
-            <a:spAutoFit/>
-          </a:bodyPr>
-          <a:lstStyle/>
-          <a:p>
-            <a:pPr algn="l">
-              <a:lnSpc>
-                <a:spcPct val="100000"/>
-              </a:lnSpc>
-              <a:spcAft>
-                <a:spcPts val="0"/>
-              </a:spcAft>
-            </a:pPr>
-            <a:r>
-              <a:rPr sz="1400" b="0">
-                <a:solidFill>
-                  <a:srgbClr val="677074"/>
-                </a:solidFill>
-                <a:latin typeface="Aptos"/>
-              </a:rPr>
-              <a:t>The demo compresses the interaction; real work retains clarification and approval gates.</a:t>
-            </a:r>
-          </a:p>
-        </p:txBody>
-      </p:sp>
-      <p:sp>
-        <p:nvSpPr>
-          <p:cNvPr id="5" name="Rounded Rectangle 4"/>
-          <p:cNvSpPr/>
-          <p:nvPr/>
-        </p:nvSpPr>
-        <p:spPr>
-          <a:xfrm>
-            <a:off x="658368" y="2029968"/>
-            <a:ext cx="4892040" cy="3346704"/>
-          </a:xfrm>
-          <a:prstGeom prst="roundRect">
-            <a:avLst>
-              <a:gd name="adj" fmla="val 6000"/>
-            </a:avLst>
-          </a:prstGeom>
-          <a:solidFill>
-            <a:srgbClr val="181D22"/>
-          </a:solidFill>
-          <a:ln>
-            <a:noFill/>
-          </a:ln>
-        </p:spPr>
-        <p:style>
-          <a:lnRef idx="1">
-            <a:schemeClr val="accent1"/>
-          </a:lnRef>
-          <a:fillRef idx="3">
-            <a:schemeClr val="accent1"/>
-          </a:fillRef>
-          <a:effectRef idx="2">
-            <a:schemeClr val="accent1"/>
-          </a:effectRef>
-          <a:fontRef idx="minor">
-            <a:schemeClr val="lt1"/>
-          </a:fontRef>
-        </p:style>
-        <p:txBody>
-          <a:bodyPr rtlCol="0" anchor="ctr"/>
-          <a:lstStyle/>
-          <a:p>
-            <a:pPr algn="ctr"/>
-          </a:p>
-        </p:txBody>
-      </p:sp>
-      <p:sp>
-        <p:nvSpPr>
-          <p:cNvPr id="6" name="TextBox 5"/>
-          <p:cNvSpPr txBox="1"/>
-          <p:nvPr/>
-        </p:nvSpPr>
-        <p:spPr>
-          <a:xfrm>
-            <a:off x="932688" y="2304288"/>
-            <a:ext cx="4206240" cy="228600"/>
-          </a:xfrm>
-          <a:prstGeom prst="rect">
-            <a:avLst/>
-          </a:prstGeom>
-          <a:noFill/>
-        </p:spPr>
-        <p:txBody>
-          <a:bodyPr wrap="square" anchor="t" lIns="0" rIns="0" tIns="0" bIns="0">
-            <a:spAutoFit/>
-          </a:bodyPr>
-          <a:lstStyle/>
-          <a:p>
-            <a:pPr algn="l">
-              <a:lnSpc>
-                <a:spcPct val="100000"/>
-              </a:lnSpc>
-              <a:spcAft>
-                <a:spcPts val="0"/>
-              </a:spcAft>
-            </a:pPr>
-            <a:r>
-              <a:rPr sz="1000" b="1">
-                <a:solidFill>
-                  <a:srgbClr val="8DE1D1"/>
-                </a:solidFill>
-                <a:latin typeface="Aptos"/>
-              </a:rPr>
-              <a:t>PROMPT 01  /  ESTABLISH</a:t>
-            </a:r>
-          </a:p>
-        </p:txBody>
-      </p:sp>
-      <p:sp>
-        <p:nvSpPr>
-          <p:cNvPr id="7" name="TextBox 6"/>
-          <p:cNvSpPr txBox="1"/>
-          <p:nvPr/>
-        </p:nvSpPr>
-        <p:spPr>
-          <a:xfrm>
-            <a:off x="932688" y="2743200"/>
-            <a:ext cx="4251960" cy="320040"/>
-          </a:xfrm>
-          <a:prstGeom prst="rect">
-            <a:avLst/>
-          </a:prstGeom>
-          <a:noFill/>
-        </p:spPr>
-        <p:txBody>
-          <a:bodyPr wrap="square" anchor="t" lIns="0" rIns="0" tIns="0" bIns="0">
-            <a:spAutoFit/>
-          </a:bodyPr>
-          <a:lstStyle/>
-          <a:p>
-            <a:pPr algn="l">
-              <a:lnSpc>
-                <a:spcPct val="100000"/>
-              </a:lnSpc>
-              <a:spcAft>
-                <a:spcPts val="0"/>
-              </a:spcAft>
-            </a:pPr>
-            <a:r>
-              <a:rPr sz="1700" b="1">
-                <a:solidFill>
-                  <a:srgbClr val="FFFFFF"/>
-                </a:solidFill>
-                <a:latin typeface="Cascadia Mono"/>
-              </a:rPr>
-              <a:t>/demo-create-project</a:t>
-            </a:r>
-          </a:p>
-        </p:txBody>
-      </p:sp>
-      <p:sp>
-        <p:nvSpPr>
-          <p:cNvPr id="8" name="TextBox 7"/>
-          <p:cNvSpPr txBox="1"/>
-          <p:nvPr/>
-        </p:nvSpPr>
-        <p:spPr>
-          <a:xfrm>
-            <a:off x="932688" y="3383280"/>
-            <a:ext cx="4160520" cy="1024128"/>
-          </a:xfrm>
-          <a:prstGeom prst="rect">
-            <a:avLst/>
-          </a:prstGeom>
-          <a:noFill/>
-        </p:spPr>
-        <p:txBody>
-          <a:bodyPr wrap="square" anchor="t" lIns="0" rIns="0" tIns="0" bIns="0">
-            <a:spAutoFit/>
-          </a:bodyPr>
-          <a:lstStyle/>
-          <a:p>
-            <a:pPr algn="l">
-              <a:lnSpc>
-                <a:spcPct val="100000"/>
-              </a:lnSpc>
-              <a:spcAft>
-                <a:spcPts val="0"/>
-              </a:spcAft>
-            </a:pPr>
-            <a:r>
-              <a:rPr sz="1400" b="0">
-                <a:solidFill>
-                  <a:srgbClr val="DEE5E3"/>
-                </a:solidFill>
-                <a:latin typeface="Aptos"/>
-              </a:rPr>
-              <a:t>Create a TypeScript project with the durable profile, tests, and Azure scaffold; verify it, then open its workspace.</a:t>
-            </a:r>
-          </a:p>
-        </p:txBody>
-      </p:sp>
-      <p:sp>
-        <p:nvSpPr>
-          <p:cNvPr id="9" name="TextBox 8"/>
-          <p:cNvSpPr txBox="1"/>
-          <p:nvPr/>
-        </p:nvSpPr>
-        <p:spPr>
-          <a:xfrm>
-            <a:off x="932688" y="4818888"/>
-            <a:ext cx="4160520" cy="274320"/>
-          </a:xfrm>
-          <a:prstGeom prst="rect">
-            <a:avLst/>
-          </a:prstGeom>
-          <a:noFill/>
-        </p:spPr>
-        <p:txBody>
-          <a:bodyPr wrap="square" anchor="t" lIns="0" rIns="0" tIns="0" bIns="0">
-            <a:spAutoFit/>
-          </a:bodyPr>
-          <a:lstStyle/>
-          <a:p>
-            <a:pPr algn="l">
-              <a:lnSpc>
-                <a:spcPct val="100000"/>
-              </a:lnSpc>
-              <a:spcAft>
-                <a:spcPts val="0"/>
-              </a:spcAft>
-            </a:pPr>
-            <a:r>
-              <a:rPr sz="1000" b="1">
-                <a:solidFill>
-                  <a:srgbClr val="E7AD32"/>
-                </a:solidFill>
-                <a:latin typeface="Aptos"/>
-              </a:rPr>
-              <a:t>OUTPUT  -&gt;  GOVERNED WORKSPACE</a:t>
-            </a:r>
-          </a:p>
-        </p:txBody>
-      </p:sp>
-      <p:sp>
-        <p:nvSpPr>
-          <p:cNvPr id="10" name="Right Arrow 9"/>
-          <p:cNvSpPr/>
-          <p:nvPr/>
-        </p:nvSpPr>
-        <p:spPr>
-          <a:xfrm>
-            <a:off x="5715000" y="3337560"/>
-            <a:ext cx="676656" cy="411480"/>
-          </a:xfrm>
-          <a:prstGeom prst="rightArrow">
-            <a:avLst/>
-          </a:prstGeom>
-          <a:solidFill>
-            <a:srgbClr val="00766C"/>
-          </a:solidFill>
-          <a:ln>
-            <a:noFill/>
-          </a:ln>
-        </p:spPr>
-        <p:style>
-          <a:lnRef idx="1">
-            <a:schemeClr val="accent1"/>
-          </a:lnRef>
-          <a:fillRef idx="3">
-            <a:schemeClr val="accent1"/>
-          </a:fillRef>
-          <a:effectRef idx="2">
-            <a:schemeClr val="accent1"/>
-          </a:effectRef>
-          <a:fontRef idx="minor">
-            <a:schemeClr val="lt1"/>
-          </a:fontRef>
-        </p:style>
-        <p:txBody>
-          <a:bodyPr rtlCol="0" anchor="ctr"/>
-          <a:lstStyle/>
-          <a:p>
-            <a:pPr algn="ctr"/>
-          </a:p>
-        </p:txBody>
-      </p:sp>
-      <p:sp>
-        <p:nvSpPr>
-          <p:cNvPr id="11" name="Rounded Rectangle 10"/>
-          <p:cNvSpPr/>
-          <p:nvPr/>
-        </p:nvSpPr>
-        <p:spPr>
-          <a:xfrm>
-            <a:off x="6592824" y="2029968"/>
-            <a:ext cx="4928616" cy="3346704"/>
-          </a:xfrm>
-          <a:prstGeom prst="roundRect">
-            <a:avLst>
-              <a:gd name="adj" fmla="val 6000"/>
-            </a:avLst>
-          </a:prstGeom>
-          <a:solidFill>
-            <a:srgbClr val="F4F1E8"/>
-          </a:solidFill>
-          <a:ln w="25400">
-            <a:solidFill>
-              <a:srgbClr val="00766C"/>
-            </a:solidFill>
-          </a:ln>
-        </p:spPr>
-        <p:style>
-          <a:lnRef idx="1">
-            <a:schemeClr val="accent1"/>
-          </a:lnRef>
-          <a:fillRef idx="3">
-            <a:schemeClr val="accent1"/>
-          </a:fillRef>
-          <a:effectRef idx="2">
-            <a:schemeClr val="accent1"/>
-          </a:effectRef>
-          <a:fontRef idx="minor">
-            <a:schemeClr val="lt1"/>
-          </a:fontRef>
-        </p:style>
-        <p:txBody>
-          <a:bodyPr rtlCol="0" anchor="ctr"/>
-          <a:lstStyle/>
-          <a:p>
-            <a:pPr algn="ctr"/>
-          </a:p>
-        </p:txBody>
-      </p:sp>
-      <p:sp>
-        <p:nvSpPr>
-          <p:cNvPr id="12" name="TextBox 11"/>
-          <p:cNvSpPr txBox="1"/>
-          <p:nvPr/>
-        </p:nvSpPr>
-        <p:spPr>
-          <a:xfrm>
-            <a:off x="6876288" y="2304288"/>
-            <a:ext cx="4206240" cy="228600"/>
-          </a:xfrm>
-          <a:prstGeom prst="rect">
-            <a:avLst/>
-          </a:prstGeom>
-          <a:noFill/>
-        </p:spPr>
-        <p:txBody>
-          <a:bodyPr wrap="square" anchor="t" lIns="0" rIns="0" tIns="0" bIns="0">
-            <a:spAutoFit/>
-          </a:bodyPr>
-          <a:lstStyle/>
-          <a:p>
-            <a:pPr algn="l">
-              <a:lnSpc>
-                <a:spcPct val="100000"/>
-              </a:lnSpc>
-              <a:spcAft>
-                <a:spcPts val="0"/>
-              </a:spcAft>
-            </a:pPr>
-            <a:r>
-              <a:rPr sz="1000" b="1">
-                <a:solidFill>
-                  <a:srgbClr val="00766C"/>
-                </a:solidFill>
-                <a:latin typeface="Aptos"/>
-              </a:rPr>
-              <a:t>PROMPT 02  /  BUILD</a:t>
-            </a:r>
-          </a:p>
-        </p:txBody>
-      </p:sp>
-      <p:sp>
-        <p:nvSpPr>
-          <p:cNvPr id="13" name="TextBox 12"/>
-          <p:cNvSpPr txBox="1"/>
-          <p:nvPr/>
-        </p:nvSpPr>
-        <p:spPr>
-          <a:xfrm>
-            <a:off x="6876288" y="2743200"/>
-            <a:ext cx="4251960" cy="320040"/>
-          </a:xfrm>
-          <a:prstGeom prst="rect">
-            <a:avLst/>
-          </a:prstGeom>
-          <a:noFill/>
-        </p:spPr>
-        <p:txBody>
-          <a:bodyPr wrap="square" anchor="t" lIns="0" rIns="0" tIns="0" bIns="0">
-            <a:spAutoFit/>
-          </a:bodyPr>
-          <a:lstStyle/>
-          <a:p>
-            <a:pPr algn="l">
-              <a:lnSpc>
-                <a:spcPct val="100000"/>
-              </a:lnSpc>
-              <a:spcAft>
-                <a:spcPts val="0"/>
-              </a:spcAft>
-            </a:pPr>
-            <a:r>
-              <a:rPr sz="1700" b="1">
-                <a:solidFill>
-                  <a:srgbClr val="181D22"/>
-                </a:solidFill>
-                <a:latin typeface="Cascadia Mono"/>
-              </a:rPr>
-              <a:t>/demo-web-app</a:t>
-            </a:r>
-          </a:p>
-        </p:txBody>
-      </p:sp>
-      <p:sp>
-        <p:nvSpPr>
-          <p:cNvPr id="14" name="TextBox 13"/>
-          <p:cNvSpPr txBox="1"/>
-          <p:nvPr/>
-        </p:nvSpPr>
-        <p:spPr>
-          <a:xfrm>
-            <a:off x="6876288" y="3383280"/>
-            <a:ext cx="4160520" cy="1024128"/>
-          </a:xfrm>
-          <a:prstGeom prst="rect">
-            <a:avLst/>
-          </a:prstGeom>
-          <a:noFill/>
-        </p:spPr>
-        <p:txBody>
-          <a:bodyPr wrap="square" anchor="t" lIns="0" rIns="0" tIns="0" bIns="0">
-            <a:spAutoFit/>
-          </a:bodyPr>
-          <a:lstStyle/>
-          <a:p>
-            <a:pPr algn="l">
-              <a:lnSpc>
-                <a:spcPct val="100000"/>
-              </a:lnSpc>
-              <a:spcAft>
-                <a:spcPts val="0"/>
-              </a:spcAft>
-            </a:pPr>
-            <a:r>
-              <a:rPr sz="1400" b="0">
-                <a:solidFill>
-                  <a:srgbClr val="677074"/>
-                </a:solidFill>
-                <a:latin typeface="Aptos"/>
-              </a:rPr>
-              <a:t>Build and test the app inside that baseline; stop at the Azure deployment approval gate before any cloud mutation.</a:t>
-            </a:r>
-          </a:p>
-        </p:txBody>
-      </p:sp>
-      <p:sp>
-        <p:nvSpPr>
-          <p:cNvPr id="15" name="TextBox 14"/>
-          <p:cNvSpPr txBox="1"/>
-          <p:nvPr/>
-        </p:nvSpPr>
-        <p:spPr>
-          <a:xfrm>
-            <a:off x="6876288" y="4818888"/>
-            <a:ext cx="4160520" cy="274320"/>
-          </a:xfrm>
-          <a:prstGeom prst="rect">
-            <a:avLst/>
-          </a:prstGeom>
-          <a:noFill/>
-        </p:spPr>
-        <p:txBody>
-          <a:bodyPr wrap="square" anchor="t" lIns="0" rIns="0" tIns="0" bIns="0">
-            <a:spAutoFit/>
-          </a:bodyPr>
-          <a:lstStyle/>
-          <a:p>
-            <a:pPr algn="l">
-              <a:lnSpc>
-                <a:spcPct val="100000"/>
-              </a:lnSpc>
-              <a:spcAft>
-                <a:spcPts val="0"/>
-              </a:spcAft>
-            </a:pPr>
-            <a:r>
-              <a:rPr sz="1000" b="1">
-                <a:solidFill>
-                  <a:srgbClr val="F06A4A"/>
-                </a:solidFill>
-                <a:latin typeface="Aptos"/>
-              </a:rPr>
-              <a:t>OUTPUT  -&gt;  WORKING, EVIDENCED APP</a:t>
-            </a:r>
-          </a:p>
-        </p:txBody>
-      </p:sp>
-      <p:sp>
-        <p:nvSpPr>
-          <p:cNvPr id="16" name="TextBox 15"/>
-          <p:cNvSpPr txBox="1"/>
-          <p:nvPr/>
-        </p:nvSpPr>
-        <p:spPr>
-          <a:xfrm>
-            <a:off x="658368" y="5779008"/>
-            <a:ext cx="10863072" cy="320040"/>
-          </a:xfrm>
-          <a:prstGeom prst="rect">
-            <a:avLst/>
-          </a:prstGeom>
-          <a:noFill/>
-        </p:spPr>
-        <p:txBody>
-          <a:bodyPr wrap="square" anchor="t" lIns="0" rIns="0" tIns="0" bIns="0">
-            <a:spAutoFit/>
-          </a:bodyPr>
-          <a:lstStyle/>
-          <a:p>
-            <a:pPr algn="ctr">
-              <a:lnSpc>
-                <a:spcPct val="100000"/>
-              </a:lnSpc>
-              <a:spcAft>
-                <a:spcPts val="0"/>
-              </a:spcAft>
-            </a:pPr>
-            <a:r>
-              <a:rPr sz="1300" b="1">
-                <a:solidFill>
-                  <a:srgbClr val="181D22"/>
-                </a:solidFill>
-                <a:latin typeface="Aptos"/>
-              </a:rPr>
-              <a:t>The product starts the project. GitHub Copilot and the team build the application inside it.</a:t>
-            </a:r>
-          </a:p>
-        </p:txBody>
-      </p:sp>
-      <p:sp>
-        <p:nvSpPr>
-          <p:cNvPr id="17" name="TextBox 16"/>
-          <p:cNvSpPr txBox="1"/>
-          <p:nvPr/>
-        </p:nvSpPr>
-        <p:spPr>
-          <a:xfrm>
-            <a:off x="658368" y="6537960"/>
-            <a:ext cx="3657600" cy="164592"/>
-          </a:xfrm>
-          <a:prstGeom prst="rect">
-            <a:avLst/>
-          </a:prstGeom>
-          <a:noFill/>
-        </p:spPr>
-        <p:txBody>
-          <a:bodyPr wrap="square" anchor="t" lIns="0" rIns="0" tIns="0" bIns="0">
-            <a:spAutoFit/>
-          </a:bodyPr>
-          <a:lstStyle/>
-          <a:p>
-            <a:pPr algn="l">
-              <a:lnSpc>
-                <a:spcPct val="100000"/>
-              </a:lnSpc>
-              <a:spcAft>
-                <a:spcPts val="0"/>
-              </a:spcAft>
-            </a:pPr>
-            <a:r>
-              <a:rPr sz="800" b="1">
-                <a:solidFill>
-                  <a:srgbClr val="677074"/>
-                </a:solidFill>
-                <a:latin typeface="Aptos"/>
-              </a:rPr>
-              <a:t>PROJECT ORCHESTRATOR</a:t>
-            </a:r>
-          </a:p>
-        </p:txBody>
-      </p:sp>
-      <p:sp>
-        <p:nvSpPr>
-          <p:cNvPr id="18" name="TextBox 17"/>
-          <p:cNvSpPr txBox="1"/>
-          <p:nvPr/>
-        </p:nvSpPr>
-        <p:spPr>
-          <a:xfrm>
-            <a:off x="11082528" y="6537960"/>
-            <a:ext cx="411480" cy="164592"/>
-          </a:xfrm>
-          <a:prstGeom prst="rect">
-            <a:avLst/>
-          </a:prstGeom>
-          <a:noFill/>
-        </p:spPr>
-        <p:txBody>
-          <a:bodyPr wrap="square" anchor="t" lIns="0" rIns="0" tIns="0" bIns="0">
-            <a:spAutoFit/>
-          </a:bodyPr>
-          <a:lstStyle/>
-          <a:p>
-            <a:pPr algn="r">
-              <a:lnSpc>
-                <a:spcPct val="100000"/>
-              </a:lnSpc>
-              <a:spcAft>
-                <a:spcPts val="0"/>
-              </a:spcAft>
-            </a:pPr>
-            <a:r>
-              <a:rPr sz="800" b="1">
-                <a:solidFill>
-                  <a:srgbClr val="677074"/>
-                </a:solidFill>
-                <a:latin typeface="Aptos"/>
-              </a:rPr>
               <a:t>09</a:t>
             </a:r>
+            <a:endParaRPr sz="800" b="1">
+              <a:solidFill>
+                <a:srgbClr val="677074"/>
+              </a:solidFill>
+              <a:latin typeface="Aptos"/>
+            </a:endParaRPr>
           </a:p>
         </p:txBody>
       </p:sp>
@@ -15502,4 +16325,10 @@
   </a:objectDefaults>
   <a:extraClrSchemeLst/>
 </a:theme>
+</file>
+
+<file path=docMetadata/LabelInfo.xml><?xml version="1.0" encoding="utf-8"?>
+<clbl:labelList xmlns:clbl="http://schemas.microsoft.com/office/2020/mipLabelMetadata">
+  <clbl:label id="{f42aa342-8706-4288-bd11-ebb85995028c}" enabled="1" method="Standard" siteId="{72f988bf-86f1-41af-91ab-2d7cd011db47}" contentBits="0" removed="0"/>
+</clbl:labelList>
 </file>